--- a/diagramas/diagramas-editaveis.pptx
+++ b/diagramas/diagramas-editaveis.pptx
@@ -2,15 +2,15 @@
 <file path=ppt/presentation.xml><?xml version="1.0" encoding="utf-8"?>
 <p:presentation xmlns:p="http://schemas.openxmlformats.org/presentationml/2006/main">
   <p:sldMasterIdLst>
-    <p:sldMasterId xmlns:r="http://schemas.openxmlformats.org/officeDocument/2006/relationships" id="2147483648" r:id="R362df2ffb598456c"/>
+    <p:sldMasterId xmlns:r="http://schemas.openxmlformats.org/officeDocument/2006/relationships" id="2147483648" r:id="R4095ab925b8b4433"/>
   </p:sldMasterIdLst>
   <p:notesMasterIdLst>
-    <p:notesMasterId xmlns:r="http://schemas.openxmlformats.org/officeDocument/2006/relationships" r:id="Re2fe82858b164788"/>
+    <p:notesMasterId xmlns:r="http://schemas.openxmlformats.org/officeDocument/2006/relationships" r:id="R4fd242c4bdef4aee"/>
   </p:notesMasterIdLst>
   <p:sldIdLst>
-    <p:sldId xmlns:r="http://schemas.openxmlformats.org/officeDocument/2006/relationships" id="256" r:id="R28759c35a2714129"/>
-    <p:sldId xmlns:r="http://schemas.openxmlformats.org/officeDocument/2006/relationships" id="257" r:id="R03253c27a2c543a6"/>
-    <p:sldId xmlns:r="http://schemas.openxmlformats.org/officeDocument/2006/relationships" id="258" r:id="R018003d93f3342e7"/>
+    <p:sldId xmlns:r="http://schemas.openxmlformats.org/officeDocument/2006/relationships" id="256" r:id="R3cf794008aa64380"/>
+    <p:sldId xmlns:r="http://schemas.openxmlformats.org/officeDocument/2006/relationships" id="257" r:id="Rec03260925b64d82"/>
+    <p:sldId xmlns:r="http://schemas.openxmlformats.org/officeDocument/2006/relationships" id="258" r:id="R5e0b375ca1094524"/>
   </p:sldIdLst>
   <p:sldSz cx="12192000" cy="6858000"/>
   <p:notesSz cx="6858000" cy="9144000"/>
@@ -640,7 +640,7 @@
   </p:cSld>
   <p:clrMap bg1="lt1" tx1="dk1" bg2="lt2" tx2="dk2" accent1="accent1" accent2="accent2" accent3="accent3" accent4="accent4" accent5="accent5" accent6="accent6" hlink="hlink" folHlink="folHlink"/>
   <p:sldLayoutIdLst>
-    <p:sldLayoutId xmlns:r="http://schemas.openxmlformats.org/officeDocument/2006/relationships" id="2147483649" r:id="R36f4c2809f8a4852"/>
+    <p:sldLayoutId xmlns:r="http://schemas.openxmlformats.org/officeDocument/2006/relationships" id="2147483649" r:id="Ra151cc1618b44faf"/>
   </p:sldLayoutIdLst>
   <p:txStyles>
     <p:titleStyle>
@@ -1191,7 +1191,7 @@
           <p:cNvPr id="14" name="Contexto do sistema">
             <a:extLst xmlns:a="http://schemas.openxmlformats.org/drawingml/2006/main">
               <a:ext uri="{FF2B5EF4-FFF2-40B4-BE49-F238E27FC236}">
-                <a16:creationId xmlns:a16="http://schemas.microsoft.com/office/drawing/2014/main" id="{8A2377AF-BC36-4C17-AB0E-DBBEB6F260EA}"/>
+                <a16:creationId xmlns:a16="http://schemas.microsoft.com/office/drawing/2014/main" id="{394640D4-17FD-4D16-B574-19F230756728}"/>
               </a:ext>
             </a:extLst>
           </p:cNvPr>
@@ -1248,7 +1248,7 @@
           <p:cNvPr id="2" name="Ações chegam ao motor. Visões filtradas retornam aos agentes.">
             <a:extLst xmlns:a="http://schemas.openxmlformats.org/drawingml/2006/main">
               <a:ext uri="{FF2B5EF4-FFF2-40B4-BE49-F238E27FC236}">
-                <a16:creationId xmlns:a16="http://schemas.microsoft.com/office/drawing/2014/main" id="{581D2987-E35A-497B-9A10-03E3BD9E0356}"/>
+                <a16:creationId xmlns:a16="http://schemas.microsoft.com/office/drawing/2014/main" id="{48D1A573-D0C1-4DC5-9381-FF1987F5F46E}"/>
               </a:ext>
             </a:extLst>
           </p:cNvPr>
@@ -1305,7 +1305,7 @@
           <p:cNvPr id="3" name="Agente A Ganhar fichas">
             <a:extLst xmlns:a="http://schemas.openxmlformats.org/drawingml/2006/main">
               <a:ext uri="{FF2B5EF4-FFF2-40B4-BE49-F238E27FC236}">
-                <a16:creationId xmlns:a16="http://schemas.microsoft.com/office/drawing/2014/main" id="{3743FD64-CC68-4ABC-9969-349BEAE8C2C4}"/>
+                <a16:creationId xmlns:a16="http://schemas.microsoft.com/office/drawing/2014/main" id="{A0E3A8DC-ED52-44F2-9EB6-9AE50A062B96}"/>
               </a:ext>
             </a:extLst>
           </p:cNvPr>
@@ -1389,7 +1389,7 @@
           <p:cNvPr id="4" name="Agente B Ganhar fichas">
             <a:extLst xmlns:a="http://schemas.openxmlformats.org/drawingml/2006/main">
               <a:ext uri="{FF2B5EF4-FFF2-40B4-BE49-F238E27FC236}">
-                <a16:creationId xmlns:a16="http://schemas.microsoft.com/office/drawing/2014/main" id="{67F43DC0-60FD-4E3C-8F04-DBA35AA49E2F}"/>
+                <a16:creationId xmlns:a16="http://schemas.microsoft.com/office/drawing/2014/main" id="{BE84A6EE-39E9-4900-92FB-C0F465754A7A}"/>
               </a:ext>
             </a:extLst>
           </p:cNvPr>
@@ -1470,10 +1470,10 @@
       </p:sp>
       <p:sp>
         <p:nvSpPr>
-          <p:cNvPr id="5" name="Motor da mão Valida e contabiliza Fornece visões filtradas">
+          <p:cNvPr id="5" name="Motor da mão Pré-flop, river ou runout Valida raise e all-in">
             <a:extLst xmlns:a="http://schemas.openxmlformats.org/drawingml/2006/main">
               <a:ext uri="{FF2B5EF4-FFF2-40B4-BE49-F238E27FC236}">
-                <a16:creationId xmlns:a16="http://schemas.microsoft.com/office/drawing/2014/main" id="{38CCFEE5-D8E0-41C6-94BA-51D508A50C8C}"/>
+                <a16:creationId xmlns:a16="http://schemas.microsoft.com/office/drawing/2014/main" id="{F07D7DD0-D941-4E6F-940E-3008D9F80A14}"/>
               </a:ext>
             </a:extLst>
           </p:cNvPr>
@@ -1506,17 +1506,17 @@
           <a:lstStyle xmlns:a="http://schemas.openxmlformats.org/drawingml/2006/main"/>
           <a:p xmlns:a="http://schemas.openxmlformats.org/drawingml/2006/main">
             <a:pPr algn="ctr">
-              <a:defRPr sz="1950" b="0">
-                <a:solidFill>
-                  <a:srgbClr val="14755E"/>
-                </a:solidFill>
-                <a:latin typeface="Arial"/>
-                <a:ea typeface="Arial"/>
-                <a:cs typeface="Arial"/>
-              </a:defRPr>
-            </a:pPr>
-            <a:r>
-              <a:rPr sz="1950" b="0">
+              <a:defRPr sz="1800" b="0">
+                <a:solidFill>
+                  <a:srgbClr val="14755E"/>
+                </a:solidFill>
+                <a:latin typeface="Arial"/>
+                <a:ea typeface="Arial"/>
+                <a:cs typeface="Arial"/>
+              </a:defRPr>
+            </a:pPr>
+            <a:r>
+              <a:rPr sz="1800" b="0">
                 <a:solidFill>
                   <a:srgbClr val="14755E"/>
                 </a:solidFill>
@@ -1529,48 +1529,48 @@
           </a:p>
           <a:p xmlns:a="http://schemas.openxmlformats.org/drawingml/2006/main">
             <a:pPr algn="ctr">
-              <a:defRPr sz="1950" b="0">
-                <a:solidFill>
-                  <a:srgbClr val="14755E"/>
-                </a:solidFill>
-                <a:latin typeface="Arial"/>
-                <a:ea typeface="Arial"/>
-                <a:cs typeface="Arial"/>
-              </a:defRPr>
-            </a:pPr>
-            <a:r>
-              <a:rPr sz="1950" b="0">
-                <a:solidFill>
-                  <a:srgbClr val="14755E"/>
-                </a:solidFill>
-                <a:latin typeface="Arial"/>
-                <a:ea typeface="Arial"/>
-                <a:cs typeface="Arial"/>
-              </a:rPr>
-              <a:t>Valida e contabiliza</a:t>
-            </a:r>
-          </a:p>
-          <a:p xmlns:a="http://schemas.openxmlformats.org/drawingml/2006/main">
-            <a:pPr algn="ctr">
-              <a:defRPr sz="1950" b="0">
-                <a:solidFill>
-                  <a:srgbClr val="14755E"/>
-                </a:solidFill>
-                <a:latin typeface="Arial"/>
-                <a:ea typeface="Arial"/>
-                <a:cs typeface="Arial"/>
-              </a:defRPr>
-            </a:pPr>
-            <a:r>
-              <a:rPr sz="1950" b="0">
-                <a:solidFill>
-                  <a:srgbClr val="14755E"/>
-                </a:solidFill>
-                <a:latin typeface="Arial"/>
-                <a:ea typeface="Arial"/>
-                <a:cs typeface="Arial"/>
-              </a:rPr>
-              <a:t>Fornece visões filtradas</a:t>
+              <a:defRPr sz="1800" b="0">
+                <a:solidFill>
+                  <a:srgbClr val="14755E"/>
+                </a:solidFill>
+                <a:latin typeface="Arial"/>
+                <a:ea typeface="Arial"/>
+                <a:cs typeface="Arial"/>
+              </a:defRPr>
+            </a:pPr>
+            <a:r>
+              <a:rPr sz="1800" b="0">
+                <a:solidFill>
+                  <a:srgbClr val="14755E"/>
+                </a:solidFill>
+                <a:latin typeface="Arial"/>
+                <a:ea typeface="Arial"/>
+                <a:cs typeface="Arial"/>
+              </a:rPr>
+              <a:t>Pré-flop, river ou runout</a:t>
+            </a:r>
+          </a:p>
+          <a:p xmlns:a="http://schemas.openxmlformats.org/drawingml/2006/main">
+            <a:pPr algn="ctr">
+              <a:defRPr sz="1800" b="0">
+                <a:solidFill>
+                  <a:srgbClr val="14755E"/>
+                </a:solidFill>
+                <a:latin typeface="Arial"/>
+                <a:ea typeface="Arial"/>
+                <a:cs typeface="Arial"/>
+              </a:defRPr>
+            </a:pPr>
+            <a:r>
+              <a:rPr sz="1800" b="0">
+                <a:solidFill>
+                  <a:srgbClr val="14755E"/>
+                </a:solidFill>
+                <a:latin typeface="Arial"/>
+                <a:ea typeface="Arial"/>
+                <a:cs typeface="Arial"/>
+              </a:rPr>
+              <a:t>Valida raise e all-in</a:t>
             </a:r>
           </a:p>
         </p:txBody>
@@ -1580,7 +1580,7 @@
           <p:cNvPr id="6" name="Registro interno Auditoria após a mão">
             <a:extLst xmlns:a="http://schemas.openxmlformats.org/drawingml/2006/main">
               <a:ext uri="{FF2B5EF4-FFF2-40B4-BE49-F238E27FC236}">
-                <a16:creationId xmlns:a16="http://schemas.microsoft.com/office/drawing/2014/main" id="{A36814B4-CCB9-4CC3-8A1E-EC4C54F2DE95}"/>
+                <a16:creationId xmlns:a16="http://schemas.microsoft.com/office/drawing/2014/main" id="{B3C2D89B-FCDC-4A13-A7F5-4653AA882814}"/>
               </a:ext>
             </a:extLst>
           </p:cNvPr>
@@ -1664,7 +1664,7 @@
           <p:cNvPr id="7" name="Operador do grupo Analisa cenário">
             <a:extLst xmlns:a="http://schemas.openxmlformats.org/drawingml/2006/main">
               <a:ext uri="{FF2B5EF4-FFF2-40B4-BE49-F238E27FC236}">
-                <a16:creationId xmlns:a16="http://schemas.microsoft.com/office/drawing/2014/main" id="{902CF691-28CF-4639-856E-A6EF89D095F4}"/>
+                <a16:creationId xmlns:a16="http://schemas.microsoft.com/office/drawing/2014/main" id="{CE80A20C-DD56-4565-B0D0-CF5C1FC56C89}"/>
               </a:ext>
             </a:extLst>
           </p:cNvPr>
@@ -1748,7 +1748,7 @@
           <p:cNvPr id="8" name="Preservar integridade, sigilo e progresso">
             <a:extLst xmlns:a="http://schemas.openxmlformats.org/drawingml/2006/main">
               <a:ext uri="{FF2B5EF4-FFF2-40B4-BE49-F238E27FC236}">
-                <a16:creationId xmlns:a16="http://schemas.microsoft.com/office/drawing/2014/main" id="{087123C2-29B2-427F-A056-72E55EA4EBBD}"/>
+                <a16:creationId xmlns:a16="http://schemas.microsoft.com/office/drawing/2014/main" id="{E62EE2EE-4B41-4232-9BA9-279D97633C0C}"/>
               </a:ext>
             </a:extLst>
           </p:cNvPr>
@@ -1965,7 +1965,7 @@
     </p:spTree>
     <p:extLst>
       <p:ext uri="{BB962C8B-B14F-4D97-AF65-F5344CB8AC3E}">
-        <p14:creationId xmlns:p14="http://schemas.microsoft.com/office/powerpoint/2010/main" val="433388818"/>
+        <p14:creationId xmlns:p14="http://schemas.microsoft.com/office/powerpoint/2010/main" val="153103621"/>
       </p:ext>
     </p:extLst>
   </p:cSld>
@@ -1993,10 +1993,10 @@
       </p:grpSpPr>
       <p:sp>
         <p:nvSpPr>
-          <p:cNvPr id="12" name="Ciclo de ação, resposta e adaptação">
+          <p:cNvPr id="17" name="Ciclo de ação, resposta e adaptação">
             <a:extLst xmlns:a="http://schemas.openxmlformats.org/drawingml/2006/main">
               <a:ext uri="{FF2B5EF4-FFF2-40B4-BE49-F238E27FC236}">
-                <a16:creationId xmlns:a16="http://schemas.microsoft.com/office/drawing/2014/main" id="{C9B77D01-747D-421D-8762-514B0E345B19}"/>
+                <a16:creationId xmlns:a16="http://schemas.microsoft.com/office/drawing/2014/main" id="{F70E4754-6C4D-48D9-B27D-EBF7187C3F1D}"/>
               </a:ext>
             </a:extLst>
           </p:cNvPr>
@@ -2050,10 +2050,10 @@
       </p:sp>
       <p:sp>
         <p:nvSpPr>
-          <p:cNvPr id="2" name="1. Flop A bet 10 / B call A=90 B=90 pote=40">
+          <p:cNvPr id="2" name="1. Pré-flop A raise para 20 (+15) B call (+10) 90 / 90, pote 40">
             <a:extLst xmlns:a="http://schemas.openxmlformats.org/drawingml/2006/main">
               <a:ext uri="{FF2B5EF4-FFF2-40B4-BE49-F238E27FC236}">
-                <a16:creationId xmlns:a16="http://schemas.microsoft.com/office/drawing/2014/main" id="{20C4C725-B0BB-422F-9310-4C8ECE6EF0D4}"/>
+                <a16:creationId xmlns:a16="http://schemas.microsoft.com/office/drawing/2014/main" id="{88E94E49-F06E-4DBA-A019-A88C08822B6A}"/>
               </a:ext>
             </a:extLst>
           </p:cNvPr>
@@ -2064,8 +2064,8 @@
         </p:nvSpPr>
         <p:spPr>
           <a:xfrm xmlns:a="http://schemas.openxmlformats.org/drawingml/2006/main">
-            <a:off x="571500" y="1476375"/>
-            <a:ext cx="3143250" cy="1285875"/>
+            <a:off x="381000" y="1362075"/>
+            <a:ext cx="2667000" cy="1476375"/>
           </a:xfrm>
           <a:prstGeom xmlns:a="http://schemas.openxmlformats.org/drawingml/2006/main" prst="rect">
             <a:avLst/>
@@ -2086,81 +2086,104 @@
           <a:lstStyle xmlns:a="http://schemas.openxmlformats.org/drawingml/2006/main"/>
           <a:p xmlns:a="http://schemas.openxmlformats.org/drawingml/2006/main">
             <a:pPr algn="ctr">
-              <a:defRPr sz="1950" b="0">
-                <a:solidFill>
-                  <a:srgbClr val="14755E"/>
-                </a:solidFill>
-                <a:latin typeface="Arial"/>
-                <a:ea typeface="Arial"/>
-                <a:cs typeface="Arial"/>
-              </a:defRPr>
-            </a:pPr>
-            <a:r>
-              <a:rPr sz="1950" b="0">
-                <a:solidFill>
-                  <a:srgbClr val="14755E"/>
-                </a:solidFill>
-                <a:latin typeface="Arial"/>
-                <a:ea typeface="Arial"/>
-                <a:cs typeface="Arial"/>
-              </a:rPr>
-              <a:t>1. Flop</a:t>
-            </a:r>
-          </a:p>
-          <a:p xmlns:a="http://schemas.openxmlformats.org/drawingml/2006/main">
-            <a:pPr algn="ctr">
-              <a:defRPr sz="1950" b="0">
-                <a:solidFill>
-                  <a:srgbClr val="14755E"/>
-                </a:solidFill>
-                <a:latin typeface="Arial"/>
-                <a:ea typeface="Arial"/>
-                <a:cs typeface="Arial"/>
-              </a:defRPr>
-            </a:pPr>
-            <a:r>
-              <a:rPr sz="1950" b="0">
-                <a:solidFill>
-                  <a:srgbClr val="14755E"/>
-                </a:solidFill>
-                <a:latin typeface="Arial"/>
-                <a:ea typeface="Arial"/>
-                <a:cs typeface="Arial"/>
-              </a:rPr>
-              <a:t>A bet 10 / B call</a:t>
-            </a:r>
-          </a:p>
-          <a:p xmlns:a="http://schemas.openxmlformats.org/drawingml/2006/main">
-            <a:pPr algn="ctr">
-              <a:defRPr sz="1950" b="0">
-                <a:solidFill>
-                  <a:srgbClr val="14755E"/>
-                </a:solidFill>
-                <a:latin typeface="Arial"/>
-                <a:ea typeface="Arial"/>
-                <a:cs typeface="Arial"/>
-              </a:defRPr>
-            </a:pPr>
-            <a:r>
-              <a:rPr sz="1950" b="0">
-                <a:solidFill>
-                  <a:srgbClr val="14755E"/>
-                </a:solidFill>
-                <a:latin typeface="Arial"/>
-                <a:ea typeface="Arial"/>
-                <a:cs typeface="Arial"/>
-              </a:rPr>
-              <a:t>A=90 B=90 pote=40</a:t>
+              <a:defRPr sz="1725" b="0">
+                <a:solidFill>
+                  <a:srgbClr val="14755E"/>
+                </a:solidFill>
+                <a:latin typeface="Arial"/>
+                <a:ea typeface="Arial"/>
+                <a:cs typeface="Arial"/>
+              </a:defRPr>
+            </a:pPr>
+            <a:r>
+              <a:rPr sz="1725" b="0">
+                <a:solidFill>
+                  <a:srgbClr val="14755E"/>
+                </a:solidFill>
+                <a:latin typeface="Arial"/>
+                <a:ea typeface="Arial"/>
+                <a:cs typeface="Arial"/>
+              </a:rPr>
+              <a:t>1. Pré-flop</a:t>
+            </a:r>
+          </a:p>
+          <a:p xmlns:a="http://schemas.openxmlformats.org/drawingml/2006/main">
+            <a:pPr algn="ctr">
+              <a:defRPr sz="1725" b="0">
+                <a:solidFill>
+                  <a:srgbClr val="14755E"/>
+                </a:solidFill>
+                <a:latin typeface="Arial"/>
+                <a:ea typeface="Arial"/>
+                <a:cs typeface="Arial"/>
+              </a:defRPr>
+            </a:pPr>
+            <a:r>
+              <a:rPr sz="1725" b="0">
+                <a:solidFill>
+                  <a:srgbClr val="14755E"/>
+                </a:solidFill>
+                <a:latin typeface="Arial"/>
+                <a:ea typeface="Arial"/>
+                <a:cs typeface="Arial"/>
+              </a:rPr>
+              <a:t>A raise para 20 (+15)</a:t>
+            </a:r>
+          </a:p>
+          <a:p xmlns:a="http://schemas.openxmlformats.org/drawingml/2006/main">
+            <a:pPr algn="ctr">
+              <a:defRPr sz="1725" b="0">
+                <a:solidFill>
+                  <a:srgbClr val="14755E"/>
+                </a:solidFill>
+                <a:latin typeface="Arial"/>
+                <a:ea typeface="Arial"/>
+                <a:cs typeface="Arial"/>
+              </a:defRPr>
+            </a:pPr>
+            <a:r>
+              <a:rPr sz="1725" b="0">
+                <a:solidFill>
+                  <a:srgbClr val="14755E"/>
+                </a:solidFill>
+                <a:latin typeface="Arial"/>
+                <a:ea typeface="Arial"/>
+                <a:cs typeface="Arial"/>
+              </a:rPr>
+              <a:t>B call (+10)</a:t>
+            </a:r>
+          </a:p>
+          <a:p xmlns:a="http://schemas.openxmlformats.org/drawingml/2006/main">
+            <a:pPr algn="ctr">
+              <a:defRPr sz="1725" b="0">
+                <a:solidFill>
+                  <a:srgbClr val="14755E"/>
+                </a:solidFill>
+                <a:latin typeface="Arial"/>
+                <a:ea typeface="Arial"/>
+                <a:cs typeface="Arial"/>
+              </a:defRPr>
+            </a:pPr>
+            <a:r>
+              <a:rPr sz="1725" b="0">
+                <a:solidFill>
+                  <a:srgbClr val="14755E"/>
+                </a:solidFill>
+                <a:latin typeface="Arial"/>
+                <a:ea typeface="Arial"/>
+                <a:cs typeface="Arial"/>
+              </a:rPr>
+              <a:t>90 / 90, pote 40</a:t>
             </a:r>
           </a:p>
         </p:txBody>
       </p:sp>
       <p:sp>
         <p:nvSpPr>
-          <p:cNvPr id="3" name="2. Turn Check / check A=90 B=90 pote=40">
+          <p:cNvPr id="3" name="2. Flop B check / A bet 10 B raise 20 / A call +10 70 / 70, pote 80">
             <a:extLst xmlns:a="http://schemas.openxmlformats.org/drawingml/2006/main">
               <a:ext uri="{FF2B5EF4-FFF2-40B4-BE49-F238E27FC236}">
-                <a16:creationId xmlns:a16="http://schemas.microsoft.com/office/drawing/2014/main" id="{29C702B4-4DD5-492A-A160-91CF60F7DE7A}"/>
+                <a16:creationId xmlns:a16="http://schemas.microsoft.com/office/drawing/2014/main" id="{23B4977C-0625-41A9-A87E-9DBFD9EB5EDE}"/>
               </a:ext>
             </a:extLst>
           </p:cNvPr>
@@ -2171,8 +2194,8 @@
         </p:nvSpPr>
         <p:spPr>
           <a:xfrm xmlns:a="http://schemas.openxmlformats.org/drawingml/2006/main">
-            <a:off x="4524375" y="1476375"/>
-            <a:ext cx="3143250" cy="1285875"/>
+            <a:off x="3305175" y="1362075"/>
+            <a:ext cx="2667000" cy="1476375"/>
           </a:xfrm>
           <a:prstGeom xmlns:a="http://schemas.openxmlformats.org/drawingml/2006/main" prst="rect">
             <a:avLst/>
@@ -2193,81 +2216,104 @@
           <a:lstStyle xmlns:a="http://schemas.openxmlformats.org/drawingml/2006/main"/>
           <a:p xmlns:a="http://schemas.openxmlformats.org/drawingml/2006/main">
             <a:pPr algn="ctr">
-              <a:defRPr sz="1950" b="0">
-                <a:solidFill>
-                  <a:srgbClr val="14755E"/>
-                </a:solidFill>
-                <a:latin typeface="Arial"/>
-                <a:ea typeface="Arial"/>
-                <a:cs typeface="Arial"/>
-              </a:defRPr>
-            </a:pPr>
-            <a:r>
-              <a:rPr sz="1950" b="0">
-                <a:solidFill>
-                  <a:srgbClr val="14755E"/>
-                </a:solidFill>
-                <a:latin typeface="Arial"/>
-                <a:ea typeface="Arial"/>
-                <a:cs typeface="Arial"/>
-              </a:rPr>
-              <a:t>2. Turn</a:t>
-            </a:r>
-          </a:p>
-          <a:p xmlns:a="http://schemas.openxmlformats.org/drawingml/2006/main">
-            <a:pPr algn="ctr">
-              <a:defRPr sz="1950" b="0">
-                <a:solidFill>
-                  <a:srgbClr val="14755E"/>
-                </a:solidFill>
-                <a:latin typeface="Arial"/>
-                <a:ea typeface="Arial"/>
-                <a:cs typeface="Arial"/>
-              </a:defRPr>
-            </a:pPr>
-            <a:r>
-              <a:rPr sz="1950" b="0">
-                <a:solidFill>
-                  <a:srgbClr val="14755E"/>
-                </a:solidFill>
-                <a:latin typeface="Arial"/>
-                <a:ea typeface="Arial"/>
-                <a:cs typeface="Arial"/>
-              </a:rPr>
-              <a:t>Check / check</a:t>
-            </a:r>
-          </a:p>
-          <a:p xmlns:a="http://schemas.openxmlformats.org/drawingml/2006/main">
-            <a:pPr algn="ctr">
-              <a:defRPr sz="1950" b="0">
-                <a:solidFill>
-                  <a:srgbClr val="14755E"/>
-                </a:solidFill>
-                <a:latin typeface="Arial"/>
-                <a:ea typeface="Arial"/>
-                <a:cs typeface="Arial"/>
-              </a:defRPr>
-            </a:pPr>
-            <a:r>
-              <a:rPr sz="1950" b="0">
-                <a:solidFill>
-                  <a:srgbClr val="14755E"/>
-                </a:solidFill>
-                <a:latin typeface="Arial"/>
-                <a:ea typeface="Arial"/>
-                <a:cs typeface="Arial"/>
-              </a:rPr>
-              <a:t>A=90 B=90 pote=40</a:t>
+              <a:defRPr sz="1725" b="0">
+                <a:solidFill>
+                  <a:srgbClr val="14755E"/>
+                </a:solidFill>
+                <a:latin typeface="Arial"/>
+                <a:ea typeface="Arial"/>
+                <a:cs typeface="Arial"/>
+              </a:defRPr>
+            </a:pPr>
+            <a:r>
+              <a:rPr sz="1725" b="0">
+                <a:solidFill>
+                  <a:srgbClr val="14755E"/>
+                </a:solidFill>
+                <a:latin typeface="Arial"/>
+                <a:ea typeface="Arial"/>
+                <a:cs typeface="Arial"/>
+              </a:rPr>
+              <a:t>2. Flop</a:t>
+            </a:r>
+          </a:p>
+          <a:p xmlns:a="http://schemas.openxmlformats.org/drawingml/2006/main">
+            <a:pPr algn="ctr">
+              <a:defRPr sz="1725" b="0">
+                <a:solidFill>
+                  <a:srgbClr val="14755E"/>
+                </a:solidFill>
+                <a:latin typeface="Arial"/>
+                <a:ea typeface="Arial"/>
+                <a:cs typeface="Arial"/>
+              </a:defRPr>
+            </a:pPr>
+            <a:r>
+              <a:rPr sz="1725" b="0">
+                <a:solidFill>
+                  <a:srgbClr val="14755E"/>
+                </a:solidFill>
+                <a:latin typeface="Arial"/>
+                <a:ea typeface="Arial"/>
+                <a:cs typeface="Arial"/>
+              </a:rPr>
+              <a:t>B check / A bet 10</a:t>
+            </a:r>
+          </a:p>
+          <a:p xmlns:a="http://schemas.openxmlformats.org/drawingml/2006/main">
+            <a:pPr algn="ctr">
+              <a:defRPr sz="1725" b="0">
+                <a:solidFill>
+                  <a:srgbClr val="14755E"/>
+                </a:solidFill>
+                <a:latin typeface="Arial"/>
+                <a:ea typeface="Arial"/>
+                <a:cs typeface="Arial"/>
+              </a:defRPr>
+            </a:pPr>
+            <a:r>
+              <a:rPr sz="1725" b="0">
+                <a:solidFill>
+                  <a:srgbClr val="14755E"/>
+                </a:solidFill>
+                <a:latin typeface="Arial"/>
+                <a:ea typeface="Arial"/>
+                <a:cs typeface="Arial"/>
+              </a:rPr>
+              <a:t>B raise 20 / A call +10</a:t>
+            </a:r>
+          </a:p>
+          <a:p xmlns:a="http://schemas.openxmlformats.org/drawingml/2006/main">
+            <a:pPr algn="ctr">
+              <a:defRPr sz="1725" b="0">
+                <a:solidFill>
+                  <a:srgbClr val="14755E"/>
+                </a:solidFill>
+                <a:latin typeface="Arial"/>
+                <a:ea typeface="Arial"/>
+                <a:cs typeface="Arial"/>
+              </a:defRPr>
+            </a:pPr>
+            <a:r>
+              <a:rPr sz="1725" b="0">
+                <a:solidFill>
+                  <a:srgbClr val="14755E"/>
+                </a:solidFill>
+                <a:latin typeface="Arial"/>
+                <a:ea typeface="Arial"/>
+                <a:cs typeface="Arial"/>
+              </a:rPr>
+              <a:t>70 / 70, pote 80</a:t>
             </a:r>
           </a:p>
         </p:txBody>
       </p:sp>
       <p:sp>
         <p:nvSpPr>
-          <p:cNvPr id="4" name="3. River A bet 20 / B call A=70 B=70 pote=80">
+          <p:cNvPr id="4" name="3. Turn B check / A check 70 / 70, pote 80">
             <a:extLst xmlns:a="http://schemas.openxmlformats.org/drawingml/2006/main">
               <a:ext uri="{FF2B5EF4-FFF2-40B4-BE49-F238E27FC236}">
-                <a16:creationId xmlns:a16="http://schemas.microsoft.com/office/drawing/2014/main" id="{A8018598-8A59-4643-903A-CEF863A2533F}"/>
+                <a16:creationId xmlns:a16="http://schemas.microsoft.com/office/drawing/2014/main" id="{54189399-62E3-4201-B36D-A021513B6E92}"/>
               </a:ext>
             </a:extLst>
           </p:cNvPr>
@@ -2278,8 +2324,8 @@
         </p:nvSpPr>
         <p:spPr>
           <a:xfrm xmlns:a="http://schemas.openxmlformats.org/drawingml/2006/main">
-            <a:off x="8477250" y="1476375"/>
-            <a:ext cx="3143250" cy="1285875"/>
+            <a:off x="6229350" y="1362075"/>
+            <a:ext cx="2667000" cy="1476375"/>
           </a:xfrm>
           <a:prstGeom xmlns:a="http://schemas.openxmlformats.org/drawingml/2006/main" prst="rect">
             <a:avLst/>
@@ -2300,133 +2346,81 @@
           <a:lstStyle xmlns:a="http://schemas.openxmlformats.org/drawingml/2006/main"/>
           <a:p xmlns:a="http://schemas.openxmlformats.org/drawingml/2006/main">
             <a:pPr algn="ctr">
-              <a:defRPr sz="1950" b="0">
-                <a:solidFill>
-                  <a:srgbClr val="14755E"/>
-                </a:solidFill>
-                <a:latin typeface="Arial"/>
-                <a:ea typeface="Arial"/>
-                <a:cs typeface="Arial"/>
-              </a:defRPr>
-            </a:pPr>
-            <a:r>
-              <a:rPr sz="1950" b="0">
-                <a:solidFill>
-                  <a:srgbClr val="14755E"/>
-                </a:solidFill>
-                <a:latin typeface="Arial"/>
-                <a:ea typeface="Arial"/>
-                <a:cs typeface="Arial"/>
-              </a:rPr>
-              <a:t>3. River</a:t>
-            </a:r>
-          </a:p>
-          <a:p xmlns:a="http://schemas.openxmlformats.org/drawingml/2006/main">
-            <a:pPr algn="ctr">
-              <a:defRPr sz="1950" b="0">
-                <a:solidFill>
-                  <a:srgbClr val="14755E"/>
-                </a:solidFill>
-                <a:latin typeface="Arial"/>
-                <a:ea typeface="Arial"/>
-                <a:cs typeface="Arial"/>
-              </a:defRPr>
-            </a:pPr>
-            <a:r>
-              <a:rPr sz="1950" b="0">
-                <a:solidFill>
-                  <a:srgbClr val="14755E"/>
-                </a:solidFill>
-                <a:latin typeface="Arial"/>
-                <a:ea typeface="Arial"/>
-                <a:cs typeface="Arial"/>
-              </a:rPr>
-              <a:t>A bet 20 / B call</a:t>
-            </a:r>
-          </a:p>
-          <a:p xmlns:a="http://schemas.openxmlformats.org/drawingml/2006/main">
-            <a:pPr algn="ctr">
-              <a:defRPr sz="1950" b="0">
-                <a:solidFill>
-                  <a:srgbClr val="14755E"/>
-                </a:solidFill>
-                <a:latin typeface="Arial"/>
-                <a:ea typeface="Arial"/>
-                <a:cs typeface="Arial"/>
-              </a:defRPr>
-            </a:pPr>
-            <a:r>
-              <a:rPr sz="1950" b="0">
-                <a:solidFill>
-                  <a:srgbClr val="14755E"/>
-                </a:solidFill>
-                <a:latin typeface="Arial"/>
-                <a:ea typeface="Arial"/>
-                <a:cs typeface="Arial"/>
-              </a:rPr>
-              <a:t>A=70 B=70 pote=80</a:t>
+              <a:defRPr sz="1725" b="0">
+                <a:solidFill>
+                  <a:srgbClr val="14755E"/>
+                </a:solidFill>
+                <a:latin typeface="Arial"/>
+                <a:ea typeface="Arial"/>
+                <a:cs typeface="Arial"/>
+              </a:defRPr>
+            </a:pPr>
+            <a:r>
+              <a:rPr sz="1725" b="0">
+                <a:solidFill>
+                  <a:srgbClr val="14755E"/>
+                </a:solidFill>
+                <a:latin typeface="Arial"/>
+                <a:ea typeface="Arial"/>
+                <a:cs typeface="Arial"/>
+              </a:rPr>
+              <a:t>3. Turn</a:t>
+            </a:r>
+          </a:p>
+          <a:p xmlns:a="http://schemas.openxmlformats.org/drawingml/2006/main">
+            <a:pPr algn="ctr">
+              <a:defRPr sz="1725" b="0">
+                <a:solidFill>
+                  <a:srgbClr val="14755E"/>
+                </a:solidFill>
+                <a:latin typeface="Arial"/>
+                <a:ea typeface="Arial"/>
+                <a:cs typeface="Arial"/>
+              </a:defRPr>
+            </a:pPr>
+            <a:r>
+              <a:rPr sz="1725" b="0">
+                <a:solidFill>
+                  <a:srgbClr val="14755E"/>
+                </a:solidFill>
+                <a:latin typeface="Arial"/>
+                <a:ea typeface="Arial"/>
+                <a:cs typeface="Arial"/>
+              </a:rPr>
+              <a:t>B check / A check</a:t>
+            </a:r>
+          </a:p>
+          <a:p xmlns:a="http://schemas.openxmlformats.org/drawingml/2006/main">
+            <a:pPr algn="ctr">
+              <a:defRPr sz="1725" b="0">
+                <a:solidFill>
+                  <a:srgbClr val="14755E"/>
+                </a:solidFill>
+                <a:latin typeface="Arial"/>
+                <a:ea typeface="Arial"/>
+                <a:cs typeface="Arial"/>
+              </a:defRPr>
+            </a:pPr>
+            <a:r>
+              <a:rPr sz="1725" b="0">
+                <a:solidFill>
+                  <a:srgbClr val="14755E"/>
+                </a:solidFill>
+                <a:latin typeface="Arial"/>
+                <a:ea typeface="Arial"/>
+                <a:cs typeface="Arial"/>
+              </a:rPr>
+              <a:t>70 / 70, pote 80</a:t>
             </a:r>
           </a:p>
         </p:txBody>
       </p:sp>
-      <p:cxnSp>
-        <p:nvCxnSpPr>
-          <p:cNvPr id="16" name=""/>
-          <p:cNvCxnSpPr>
-            <a:stCxn xmlns:a="http://schemas.openxmlformats.org/drawingml/2006/main" id="2" idx="3"/>
-            <a:endCxn xmlns:a="http://schemas.openxmlformats.org/drawingml/2006/main" id="3" idx="1"/>
-          </p:cNvCxnSpPr>
-          <p:nvPr/>
-        </p:nvCxnSpPr>
-        <p:spPr>
-          <a:xfrm xmlns:a="http://schemas.openxmlformats.org/drawingml/2006/main">
-            <a:off x="3714750" y="2119313"/>
-            <a:ext cx="809625" cy="0"/>
-          </a:xfrm>
-          <a:prstGeom xmlns:a="http://schemas.openxmlformats.org/drawingml/2006/main" prst="straightConnector1">
-            <a:avLst/>
-          </a:prstGeom>
-          <a:ln xmlns:a="http://schemas.openxmlformats.org/drawingml/2006/main" w="19050">
-            <a:solidFill>
-              <a:srgbClr val="486274"/>
-            </a:solidFill>
-            <a:prstDash val="solid"/>
-            <a:tailEnd type="triangle" w="sm" len="sm"/>
-          </a:ln>
-        </p:spPr>
-      </p:cxnSp>
-      <p:cxnSp>
-        <p:nvCxnSpPr>
-          <p:cNvPr id="17" name=""/>
-          <p:cNvCxnSpPr>
-            <a:stCxn xmlns:a="http://schemas.openxmlformats.org/drawingml/2006/main" id="3" idx="3"/>
-            <a:endCxn xmlns:a="http://schemas.openxmlformats.org/drawingml/2006/main" id="4" idx="1"/>
-          </p:cNvCxnSpPr>
-          <p:nvPr/>
-        </p:nvCxnSpPr>
-        <p:spPr>
-          <a:xfrm xmlns:a="http://schemas.openxmlformats.org/drawingml/2006/main">
-            <a:off x="7667625" y="2119313"/>
-            <a:ext cx="809625" cy="0"/>
-          </a:xfrm>
-          <a:prstGeom xmlns:a="http://schemas.openxmlformats.org/drawingml/2006/main" prst="straightConnector1">
-            <a:avLst/>
-          </a:prstGeom>
-          <a:ln xmlns:a="http://schemas.openxmlformats.org/drawingml/2006/main" w="19050">
-            <a:solidFill>
-              <a:srgbClr val="486274"/>
-            </a:solidFill>
-            <a:prstDash val="solid"/>
-            <a:tailEnd type="triangle" w="sm" len="sm"/>
-          </a:ln>
-        </p:spPr>
-      </p:cxnSp>
       <p:sp>
         <p:nvSpPr>
-          <p:cNvPr id="7" name="A observa resistência&#10;e planeja check.&#10;B muda para indução.">
+          <p:cNvPr id="5" name="4. River B check / A bet 20 B call 20 50 / 50, pote 120">
             <a:extLst xmlns:a="http://schemas.openxmlformats.org/drawingml/2006/main">
               <a:ext uri="{FF2B5EF4-FFF2-40B4-BE49-F238E27FC236}">
-                <a16:creationId xmlns:a16="http://schemas.microsoft.com/office/drawing/2014/main" id="{463B1A95-1BED-45AB-8987-50536852236E}"/>
+                <a16:creationId xmlns:a16="http://schemas.microsoft.com/office/drawing/2014/main" id="{FB9FC678-95D4-4AAB-84AC-81A75920E5AC}"/>
               </a:ext>
             </a:extLst>
           </p:cNvPr>
@@ -2437,99 +2431,204 @@
         </p:nvSpPr>
         <p:spPr>
           <a:xfrm xmlns:a="http://schemas.openxmlformats.org/drawingml/2006/main">
-            <a:off x="571500" y="3095625"/>
-            <a:ext cx="3143250" cy="1266825"/>
+            <a:off x="9153525" y="1362075"/>
+            <a:ext cx="2667000" cy="1476375"/>
           </a:xfrm>
           <a:prstGeom xmlns:a="http://schemas.openxmlformats.org/drawingml/2006/main" prst="rect">
             <a:avLst/>
           </a:prstGeom>
-          <a:noFill xmlns:a="http://schemas.openxmlformats.org/drawingml/2006/main"/>
-          <a:ln xmlns:a="http://schemas.openxmlformats.org/drawingml/2006/main" w="0">
-            <a:noFill/>
+          <a:solidFill xmlns:a="http://schemas.openxmlformats.org/drawingml/2006/main">
+            <a:srgbClr val="E7F2ED"/>
+          </a:solidFill>
+          <a:ln xmlns:a="http://schemas.openxmlformats.org/drawingml/2006/main" w="15240">
+            <a:solidFill>
+              <a:srgbClr val="14755E"/>
+            </a:solidFill>
           </a:ln>
         </p:spPr>
         <p:txBody>
-          <a:bodyPr xmlns:a="http://schemas.openxmlformats.org/drawingml/2006/main" wrap="square" lIns="0" tIns="0" rIns="0" bIns="0" anchor="t">
+          <a:bodyPr xmlns:a="http://schemas.openxmlformats.org/drawingml/2006/main" wrap="square" lIns="95250" tIns="85725" rIns="95250" bIns="85725" anchor="ctr">
             <a:noAutofit/>
           </a:bodyPr>
           <a:lstStyle xmlns:a="http://schemas.openxmlformats.org/drawingml/2006/main"/>
           <a:p xmlns:a="http://schemas.openxmlformats.org/drawingml/2006/main">
-            <a:pPr algn="l">
-              <a:defRPr sz="2025" b="0">
-                <a:solidFill>
-                  <a:srgbClr val="143042"/>
-                </a:solidFill>
-                <a:latin typeface="Arial"/>
-                <a:ea typeface="Arial"/>
-                <a:cs typeface="Arial"/>
-              </a:defRPr>
-            </a:pPr>
-            <a:r>
-              <a:rPr sz="2025" b="0">
-                <a:solidFill>
-                  <a:srgbClr val="143042"/>
-                </a:solidFill>
-                <a:latin typeface="Arial"/>
-                <a:ea typeface="Arial"/>
-                <a:cs typeface="Arial"/>
-              </a:rPr>
-              <a:t>A observa resistência</a:t>
-            </a:r>
-          </a:p>
-          <a:p xmlns:a="http://schemas.openxmlformats.org/drawingml/2006/main">
-            <a:pPr algn="l">
-              <a:defRPr sz="2025" b="0">
-                <a:solidFill>
-                  <a:srgbClr val="143042"/>
-                </a:solidFill>
-                <a:latin typeface="Arial"/>
-                <a:ea typeface="Arial"/>
-                <a:cs typeface="Arial"/>
-              </a:defRPr>
-            </a:pPr>
-            <a:r>
-              <a:rPr sz="2025" b="0">
-                <a:solidFill>
-                  <a:srgbClr val="143042"/>
-                </a:solidFill>
-                <a:latin typeface="Arial"/>
-                <a:ea typeface="Arial"/>
-                <a:cs typeface="Arial"/>
-              </a:rPr>
-              <a:t>e planeja check.</a:t>
-            </a:r>
-          </a:p>
-          <a:p xmlns:a="http://schemas.openxmlformats.org/drawingml/2006/main">
-            <a:pPr algn="l">
-              <a:defRPr sz="2025" b="0">
-                <a:solidFill>
-                  <a:srgbClr val="143042"/>
-                </a:solidFill>
-                <a:latin typeface="Arial"/>
-                <a:ea typeface="Arial"/>
-                <a:cs typeface="Arial"/>
-              </a:defRPr>
-            </a:pPr>
-            <a:r>
-              <a:rPr sz="2025" b="0">
-                <a:solidFill>
-                  <a:srgbClr val="143042"/>
-                </a:solidFill>
-                <a:latin typeface="Arial"/>
-                <a:ea typeface="Arial"/>
-                <a:cs typeface="Arial"/>
-              </a:rPr>
-              <a:t>B muda para indução.</a:t>
+            <a:pPr algn="ctr">
+              <a:defRPr sz="1725" b="0">
+                <a:solidFill>
+                  <a:srgbClr val="14755E"/>
+                </a:solidFill>
+                <a:latin typeface="Arial"/>
+                <a:ea typeface="Arial"/>
+                <a:cs typeface="Arial"/>
+              </a:defRPr>
+            </a:pPr>
+            <a:r>
+              <a:rPr sz="1725" b="0">
+                <a:solidFill>
+                  <a:srgbClr val="14755E"/>
+                </a:solidFill>
+                <a:latin typeface="Arial"/>
+                <a:ea typeface="Arial"/>
+                <a:cs typeface="Arial"/>
+              </a:rPr>
+              <a:t>4. River</a:t>
+            </a:r>
+          </a:p>
+          <a:p xmlns:a="http://schemas.openxmlformats.org/drawingml/2006/main">
+            <a:pPr algn="ctr">
+              <a:defRPr sz="1725" b="0">
+                <a:solidFill>
+                  <a:srgbClr val="14755E"/>
+                </a:solidFill>
+                <a:latin typeface="Arial"/>
+                <a:ea typeface="Arial"/>
+                <a:cs typeface="Arial"/>
+              </a:defRPr>
+            </a:pPr>
+            <a:r>
+              <a:rPr sz="1725" b="0">
+                <a:solidFill>
+                  <a:srgbClr val="14755E"/>
+                </a:solidFill>
+                <a:latin typeface="Arial"/>
+                <a:ea typeface="Arial"/>
+                <a:cs typeface="Arial"/>
+              </a:rPr>
+              <a:t>B check / A bet 20</a:t>
+            </a:r>
+          </a:p>
+          <a:p xmlns:a="http://schemas.openxmlformats.org/drawingml/2006/main">
+            <a:pPr algn="ctr">
+              <a:defRPr sz="1725" b="0">
+                <a:solidFill>
+                  <a:srgbClr val="14755E"/>
+                </a:solidFill>
+                <a:latin typeface="Arial"/>
+                <a:ea typeface="Arial"/>
+                <a:cs typeface="Arial"/>
+              </a:defRPr>
+            </a:pPr>
+            <a:r>
+              <a:rPr sz="1725" b="0">
+                <a:solidFill>
+                  <a:srgbClr val="14755E"/>
+                </a:solidFill>
+                <a:latin typeface="Arial"/>
+                <a:ea typeface="Arial"/>
+                <a:cs typeface="Arial"/>
+              </a:rPr>
+              <a:t>B call 20</a:t>
+            </a:r>
+          </a:p>
+          <a:p xmlns:a="http://schemas.openxmlformats.org/drawingml/2006/main">
+            <a:pPr algn="ctr">
+              <a:defRPr sz="1725" b="0">
+                <a:solidFill>
+                  <a:srgbClr val="14755E"/>
+                </a:solidFill>
+                <a:latin typeface="Arial"/>
+                <a:ea typeface="Arial"/>
+                <a:cs typeface="Arial"/>
+              </a:defRPr>
+            </a:pPr>
+            <a:r>
+              <a:rPr sz="1725" b="0">
+                <a:solidFill>
+                  <a:srgbClr val="14755E"/>
+                </a:solidFill>
+                <a:latin typeface="Arial"/>
+                <a:ea typeface="Arial"/>
+                <a:cs typeface="Arial"/>
+              </a:rPr>
+              <a:t>50 / 50, pote 120</a:t>
             </a:r>
           </a:p>
         </p:txBody>
       </p:sp>
+      <p:cxnSp>
+        <p:nvCxnSpPr>
+          <p:cNvPr id="22" name=""/>
+          <p:cNvCxnSpPr>
+            <a:stCxn xmlns:a="http://schemas.openxmlformats.org/drawingml/2006/main" id="2" idx="3"/>
+            <a:endCxn xmlns:a="http://schemas.openxmlformats.org/drawingml/2006/main" id="3" idx="1"/>
+          </p:cNvCxnSpPr>
+          <p:nvPr/>
+        </p:nvCxnSpPr>
+        <p:spPr>
+          <a:xfrm xmlns:a="http://schemas.openxmlformats.org/drawingml/2006/main">
+            <a:off x="3048000" y="2100263"/>
+            <a:ext cx="257175" cy="0"/>
+          </a:xfrm>
+          <a:prstGeom xmlns:a="http://schemas.openxmlformats.org/drawingml/2006/main" prst="straightConnector1">
+            <a:avLst/>
+          </a:prstGeom>
+          <a:ln xmlns:a="http://schemas.openxmlformats.org/drawingml/2006/main" w="19050">
+            <a:solidFill>
+              <a:srgbClr val="486274"/>
+            </a:solidFill>
+            <a:prstDash val="solid"/>
+            <a:tailEnd type="triangle" w="sm" len="sm"/>
+          </a:ln>
+        </p:spPr>
+      </p:cxnSp>
+      <p:cxnSp>
+        <p:nvCxnSpPr>
+          <p:cNvPr id="23" name=""/>
+          <p:cNvCxnSpPr>
+            <a:stCxn xmlns:a="http://schemas.openxmlformats.org/drawingml/2006/main" id="3" idx="3"/>
+            <a:endCxn xmlns:a="http://schemas.openxmlformats.org/drawingml/2006/main" id="4" idx="1"/>
+          </p:cNvCxnSpPr>
+          <p:nvPr/>
+        </p:nvCxnSpPr>
+        <p:spPr>
+          <a:xfrm xmlns:a="http://schemas.openxmlformats.org/drawingml/2006/main">
+            <a:off x="5972175" y="2100263"/>
+            <a:ext cx="257175" cy="0"/>
+          </a:xfrm>
+          <a:prstGeom xmlns:a="http://schemas.openxmlformats.org/drawingml/2006/main" prst="straightConnector1">
+            <a:avLst/>
+          </a:prstGeom>
+          <a:ln xmlns:a="http://schemas.openxmlformats.org/drawingml/2006/main" w="19050">
+            <a:solidFill>
+              <a:srgbClr val="486274"/>
+            </a:solidFill>
+            <a:prstDash val="solid"/>
+            <a:tailEnd type="triangle" w="sm" len="sm"/>
+          </a:ln>
+        </p:spPr>
+      </p:cxnSp>
+      <p:cxnSp>
+        <p:nvCxnSpPr>
+          <p:cNvPr id="24" name=""/>
+          <p:cNvCxnSpPr>
+            <a:stCxn xmlns:a="http://schemas.openxmlformats.org/drawingml/2006/main" id="4" idx="3"/>
+            <a:endCxn xmlns:a="http://schemas.openxmlformats.org/drawingml/2006/main" id="5" idx="1"/>
+          </p:cNvCxnSpPr>
+          <p:nvPr/>
+        </p:nvCxnSpPr>
+        <p:spPr>
+          <a:xfrm xmlns:a="http://schemas.openxmlformats.org/drawingml/2006/main">
+            <a:off x="8896350" y="2100263"/>
+            <a:ext cx="257175" cy="0"/>
+          </a:xfrm>
+          <a:prstGeom xmlns:a="http://schemas.openxmlformats.org/drawingml/2006/main" prst="straightConnector1">
+            <a:avLst/>
+          </a:prstGeom>
+          <a:ln xmlns:a="http://schemas.openxmlformats.org/drawingml/2006/main" w="19050">
+            <a:solidFill>
+              <a:srgbClr val="486274"/>
+            </a:solidFill>
+            <a:prstDash val="solid"/>
+            <a:tailEnd type="triangle" w="sm" len="sm"/>
+          </a:ln>
+        </p:spPr>
+      </p:cxnSp>
       <p:sp>
         <p:nvSpPr>
-          <p:cNvPr id="8" name="A lê possível fraqueza.&#10;B aceita custo de&#10;oportunidade e induz.">
+          <p:cNvPr id="9" name="A mantém teste.&#10;B mantém A interessado&#10;e prepara raise.">
             <a:extLst xmlns:a="http://schemas.openxmlformats.org/drawingml/2006/main">
               <a:ext uri="{FF2B5EF4-FFF2-40B4-BE49-F238E27FC236}">
-                <a16:creationId xmlns:a16="http://schemas.microsoft.com/office/drawing/2014/main" id="{8A993889-8D25-4C2D-B5D2-995E38144557}"/>
+                <a16:creationId xmlns:a16="http://schemas.microsoft.com/office/drawing/2014/main" id="{5CECC761-BE27-455C-A95D-FDF11404E553}"/>
               </a:ext>
             </a:extLst>
           </p:cNvPr>
@@ -2540,8 +2639,8 @@
         </p:nvSpPr>
         <p:spPr>
           <a:xfrm xmlns:a="http://schemas.openxmlformats.org/drawingml/2006/main">
-            <a:off x="4524375" y="3095625"/>
-            <a:ext cx="3143250" cy="1266825"/>
+            <a:off x="381000" y="3048000"/>
+            <a:ext cx="2667000" cy="1238250"/>
           </a:xfrm>
           <a:prstGeom xmlns:a="http://schemas.openxmlformats.org/drawingml/2006/main" prst="rect">
             <a:avLst/>
@@ -2558,81 +2657,81 @@
           <a:lstStyle xmlns:a="http://schemas.openxmlformats.org/drawingml/2006/main"/>
           <a:p xmlns:a="http://schemas.openxmlformats.org/drawingml/2006/main">
             <a:pPr algn="l">
-              <a:defRPr sz="2025" b="0">
-                <a:solidFill>
-                  <a:srgbClr val="143042"/>
-                </a:solidFill>
-                <a:latin typeface="Arial"/>
-                <a:ea typeface="Arial"/>
-                <a:cs typeface="Arial"/>
-              </a:defRPr>
-            </a:pPr>
-            <a:r>
-              <a:rPr sz="2025" b="0">
-                <a:solidFill>
-                  <a:srgbClr val="143042"/>
-                </a:solidFill>
-                <a:latin typeface="Arial"/>
-                <a:ea typeface="Arial"/>
-                <a:cs typeface="Arial"/>
-              </a:rPr>
-              <a:t>A lê possível fraqueza.</a:t>
+              <a:defRPr sz="1800" b="0">
+                <a:solidFill>
+                  <a:srgbClr val="143042"/>
+                </a:solidFill>
+                <a:latin typeface="Arial"/>
+                <a:ea typeface="Arial"/>
+                <a:cs typeface="Arial"/>
+              </a:defRPr>
+            </a:pPr>
+            <a:r>
+              <a:rPr sz="1800" b="0">
+                <a:solidFill>
+                  <a:srgbClr val="143042"/>
+                </a:solidFill>
+                <a:latin typeface="Arial"/>
+                <a:ea typeface="Arial"/>
+                <a:cs typeface="Arial"/>
+              </a:rPr>
+              <a:t>A mantém teste.</a:t>
             </a:r>
           </a:p>
           <a:p xmlns:a="http://schemas.openxmlformats.org/drawingml/2006/main">
             <a:pPr algn="l">
-              <a:defRPr sz="2025" b="0">
-                <a:solidFill>
-                  <a:srgbClr val="143042"/>
-                </a:solidFill>
-                <a:latin typeface="Arial"/>
-                <a:ea typeface="Arial"/>
-                <a:cs typeface="Arial"/>
-              </a:defRPr>
-            </a:pPr>
-            <a:r>
-              <a:rPr sz="2025" b="0">
-                <a:solidFill>
-                  <a:srgbClr val="143042"/>
-                </a:solidFill>
-                <a:latin typeface="Arial"/>
-                <a:ea typeface="Arial"/>
-                <a:cs typeface="Arial"/>
-              </a:rPr>
-              <a:t>B aceita custo de</a:t>
+              <a:defRPr sz="1800" b="0">
+                <a:solidFill>
+                  <a:srgbClr val="143042"/>
+                </a:solidFill>
+                <a:latin typeface="Arial"/>
+                <a:ea typeface="Arial"/>
+                <a:cs typeface="Arial"/>
+              </a:defRPr>
+            </a:pPr>
+            <a:r>
+              <a:rPr sz="1800" b="0">
+                <a:solidFill>
+                  <a:srgbClr val="143042"/>
+                </a:solidFill>
+                <a:latin typeface="Arial"/>
+                <a:ea typeface="Arial"/>
+                <a:cs typeface="Arial"/>
+              </a:rPr>
+              <a:t>B mantém A interessado</a:t>
             </a:r>
           </a:p>
           <a:p xmlns:a="http://schemas.openxmlformats.org/drawingml/2006/main">
             <a:pPr algn="l">
-              <a:defRPr sz="2025" b="0">
-                <a:solidFill>
-                  <a:srgbClr val="143042"/>
-                </a:solidFill>
-                <a:latin typeface="Arial"/>
-                <a:ea typeface="Arial"/>
-                <a:cs typeface="Arial"/>
-              </a:defRPr>
-            </a:pPr>
-            <a:r>
-              <a:rPr sz="2025" b="0">
-                <a:solidFill>
-                  <a:srgbClr val="143042"/>
-                </a:solidFill>
-                <a:latin typeface="Arial"/>
-                <a:ea typeface="Arial"/>
-                <a:cs typeface="Arial"/>
-              </a:rPr>
-              <a:t>oportunidade e induz.</a:t>
+              <a:defRPr sz="1800" b="0">
+                <a:solidFill>
+                  <a:srgbClr val="143042"/>
+                </a:solidFill>
+                <a:latin typeface="Arial"/>
+                <a:ea typeface="Arial"/>
+                <a:cs typeface="Arial"/>
+              </a:defRPr>
+            </a:pPr>
+            <a:r>
+              <a:rPr sz="1800" b="0">
+                <a:solidFill>
+                  <a:srgbClr val="143042"/>
+                </a:solidFill>
+                <a:latin typeface="Arial"/>
+                <a:ea typeface="Arial"/>
+                <a:cs typeface="Arial"/>
+              </a:rPr>
+              <a:t>e prepara raise.</a:t>
             </a:r>
           </a:p>
         </p:txBody>
       </p:sp>
       <p:sp>
         <p:nvSpPr>
-          <p:cNvPr id="9" name="Revelação: B vence.&#10;A=70 B=150 pote=0.&#10;Leitura de A falhou.">
+          <p:cNvPr id="10" name="A recua após raise.&#10;B vê call e troca&#10;aposta por indução.">
             <a:extLst xmlns:a="http://schemas.openxmlformats.org/drawingml/2006/main">
               <a:ext uri="{FF2B5EF4-FFF2-40B4-BE49-F238E27FC236}">
-                <a16:creationId xmlns:a16="http://schemas.microsoft.com/office/drawing/2014/main" id="{CC62EDCA-17F8-4098-9F61-BF857A983570}"/>
+                <a16:creationId xmlns:a16="http://schemas.microsoft.com/office/drawing/2014/main" id="{AA18ACCC-7B26-44C8-84FE-61454A98AF98}"/>
               </a:ext>
             </a:extLst>
           </p:cNvPr>
@@ -2643,8 +2742,8 @@
         </p:nvSpPr>
         <p:spPr>
           <a:xfrm xmlns:a="http://schemas.openxmlformats.org/drawingml/2006/main">
-            <a:off x="8477250" y="3095625"/>
-            <a:ext cx="3143250" cy="1266825"/>
+            <a:off x="3305175" y="3048000"/>
+            <a:ext cx="2667000" cy="1238250"/>
           </a:xfrm>
           <a:prstGeom xmlns:a="http://schemas.openxmlformats.org/drawingml/2006/main" prst="rect">
             <a:avLst/>
@@ -2661,81 +2760,81 @@
           <a:lstStyle xmlns:a="http://schemas.openxmlformats.org/drawingml/2006/main"/>
           <a:p xmlns:a="http://schemas.openxmlformats.org/drawingml/2006/main">
             <a:pPr algn="l">
-              <a:defRPr sz="2025" b="0">
-                <a:solidFill>
-                  <a:srgbClr val="143042"/>
-                </a:solidFill>
-                <a:latin typeface="Arial"/>
-                <a:ea typeface="Arial"/>
-                <a:cs typeface="Arial"/>
-              </a:defRPr>
-            </a:pPr>
-            <a:r>
-              <a:rPr sz="2025" b="0">
-                <a:solidFill>
-                  <a:srgbClr val="143042"/>
-                </a:solidFill>
-                <a:latin typeface="Arial"/>
-                <a:ea typeface="Arial"/>
-                <a:cs typeface="Arial"/>
-              </a:rPr>
-              <a:t>Revelação: B vence.</a:t>
+              <a:defRPr sz="1800" b="0">
+                <a:solidFill>
+                  <a:srgbClr val="143042"/>
+                </a:solidFill>
+                <a:latin typeface="Arial"/>
+                <a:ea typeface="Arial"/>
+                <a:cs typeface="Arial"/>
+              </a:defRPr>
+            </a:pPr>
+            <a:r>
+              <a:rPr sz="1800" b="0">
+                <a:solidFill>
+                  <a:srgbClr val="143042"/>
+                </a:solidFill>
+                <a:latin typeface="Arial"/>
+                <a:ea typeface="Arial"/>
+                <a:cs typeface="Arial"/>
+              </a:rPr>
+              <a:t>A recua após raise.</a:t>
             </a:r>
           </a:p>
           <a:p xmlns:a="http://schemas.openxmlformats.org/drawingml/2006/main">
             <a:pPr algn="l">
-              <a:defRPr sz="2025" b="0">
-                <a:solidFill>
-                  <a:srgbClr val="143042"/>
-                </a:solidFill>
-                <a:latin typeface="Arial"/>
-                <a:ea typeface="Arial"/>
-                <a:cs typeface="Arial"/>
-              </a:defRPr>
-            </a:pPr>
-            <a:r>
-              <a:rPr sz="2025" b="0">
-                <a:solidFill>
-                  <a:srgbClr val="143042"/>
-                </a:solidFill>
-                <a:latin typeface="Arial"/>
-                <a:ea typeface="Arial"/>
-                <a:cs typeface="Arial"/>
-              </a:rPr>
-              <a:t>A=70 B=150 pote=0.</a:t>
+              <a:defRPr sz="1800" b="0">
+                <a:solidFill>
+                  <a:srgbClr val="143042"/>
+                </a:solidFill>
+                <a:latin typeface="Arial"/>
+                <a:ea typeface="Arial"/>
+                <a:cs typeface="Arial"/>
+              </a:defRPr>
+            </a:pPr>
+            <a:r>
+              <a:rPr sz="1800" b="0">
+                <a:solidFill>
+                  <a:srgbClr val="143042"/>
+                </a:solidFill>
+                <a:latin typeface="Arial"/>
+                <a:ea typeface="Arial"/>
+                <a:cs typeface="Arial"/>
+              </a:rPr>
+              <a:t>B vê call e troca</a:t>
             </a:r>
           </a:p>
           <a:p xmlns:a="http://schemas.openxmlformats.org/drawingml/2006/main">
             <a:pPr algn="l">
-              <a:defRPr sz="2025" b="0">
-                <a:solidFill>
-                  <a:srgbClr val="143042"/>
-                </a:solidFill>
-                <a:latin typeface="Arial"/>
-                <a:ea typeface="Arial"/>
-                <a:cs typeface="Arial"/>
-              </a:defRPr>
-            </a:pPr>
-            <a:r>
-              <a:rPr sz="2025" b="0">
-                <a:solidFill>
-                  <a:srgbClr val="143042"/>
-                </a:solidFill>
-                <a:latin typeface="Arial"/>
-                <a:ea typeface="Arial"/>
-                <a:cs typeface="Arial"/>
-              </a:rPr>
-              <a:t>Leitura de A falhou.</a:t>
+              <a:defRPr sz="1800" b="0">
+                <a:solidFill>
+                  <a:srgbClr val="143042"/>
+                </a:solidFill>
+                <a:latin typeface="Arial"/>
+                <a:ea typeface="Arial"/>
+                <a:cs typeface="Arial"/>
+              </a:defRPr>
+            </a:pPr>
+            <a:r>
+              <a:rPr sz="1800" b="0">
+                <a:solidFill>
+                  <a:srgbClr val="143042"/>
+                </a:solidFill>
+                <a:latin typeface="Arial"/>
+                <a:ea typeface="Arial"/>
+                <a:cs typeface="Arial"/>
+              </a:rPr>
+              <a:t>aposta por indução.</a:t>
             </a:r>
           </a:p>
         </p:txBody>
       </p:sp>
       <p:sp>
         <p:nvSpPr>
-          <p:cNvPr id="10" name="Custo de B: perder oportunidade de aposta ou permitir melhora da ">
+          <p:cNvPr id="11" name="A lê possível fraqueza.&#10;B observa recuo e&#10;mantém indução.">
             <a:extLst xmlns:a="http://schemas.openxmlformats.org/drawingml/2006/main">
               <a:ext uri="{FF2B5EF4-FFF2-40B4-BE49-F238E27FC236}">
-                <a16:creationId xmlns:a16="http://schemas.microsoft.com/office/drawing/2014/main" id="{FBA497D6-E0EC-4880-8799-0602378DE73D}"/>
+                <a16:creationId xmlns:a16="http://schemas.microsoft.com/office/drawing/2014/main" id="{19568920-7CA5-4A09-A55C-A93FF349C7F3}"/>
               </a:ext>
             </a:extLst>
           </p:cNvPr>
@@ -2746,8 +2845,8 @@
         </p:nvSpPr>
         <p:spPr>
           <a:xfrm xmlns:a="http://schemas.openxmlformats.org/drawingml/2006/main">
-            <a:off x="571500" y="4762500"/>
-            <a:ext cx="11049000" cy="742950"/>
+            <a:off x="6229350" y="3048000"/>
+            <a:ext cx="2667000" cy="1238250"/>
           </a:xfrm>
           <a:prstGeom xmlns:a="http://schemas.openxmlformats.org/drawingml/2006/main" prst="rect">
             <a:avLst/>
@@ -2764,35 +2863,81 @@
           <a:lstStyle xmlns:a="http://schemas.openxmlformats.org/drawingml/2006/main"/>
           <a:p xmlns:a="http://schemas.openxmlformats.org/drawingml/2006/main">
             <a:pPr algn="l">
-              <a:defRPr sz="2175" b="1">
-                <a:solidFill>
-                  <a:srgbClr val="14755E"/>
-                </a:solidFill>
-                <a:latin typeface="Arial"/>
-                <a:ea typeface="Arial"/>
-                <a:cs typeface="Arial"/>
-              </a:defRPr>
-            </a:pPr>
-            <a:r>
-              <a:rPr sz="2175" b="1">
-                <a:solidFill>
-                  <a:srgbClr val="14755E"/>
-                </a:solidFill>
-                <a:latin typeface="Arial"/>
-                <a:ea typeface="Arial"/>
-                <a:cs typeface="Arial"/>
-              </a:rPr>
-              <a:t>Custo de B: perder oportunidade de aposta ou permitir melhora da mão adversária.</a:t>
+              <a:defRPr sz="1800" b="0">
+                <a:solidFill>
+                  <a:srgbClr val="143042"/>
+                </a:solidFill>
+                <a:latin typeface="Arial"/>
+                <a:ea typeface="Arial"/>
+                <a:cs typeface="Arial"/>
+              </a:defRPr>
+            </a:pPr>
+            <a:r>
+              <a:rPr sz="1800" b="0">
+                <a:solidFill>
+                  <a:srgbClr val="143042"/>
+                </a:solidFill>
+                <a:latin typeface="Arial"/>
+                <a:ea typeface="Arial"/>
+                <a:cs typeface="Arial"/>
+              </a:rPr>
+              <a:t>A lê possível fraqueza.</a:t>
+            </a:r>
+          </a:p>
+          <a:p xmlns:a="http://schemas.openxmlformats.org/drawingml/2006/main">
+            <a:pPr algn="l">
+              <a:defRPr sz="1800" b="0">
+                <a:solidFill>
+                  <a:srgbClr val="143042"/>
+                </a:solidFill>
+                <a:latin typeface="Arial"/>
+                <a:ea typeface="Arial"/>
+                <a:cs typeface="Arial"/>
+              </a:defRPr>
+            </a:pPr>
+            <a:r>
+              <a:rPr sz="1800" b="0">
+                <a:solidFill>
+                  <a:srgbClr val="143042"/>
+                </a:solidFill>
+                <a:latin typeface="Arial"/>
+                <a:ea typeface="Arial"/>
+                <a:cs typeface="Arial"/>
+              </a:rPr>
+              <a:t>B observa recuo e</a:t>
+            </a:r>
+          </a:p>
+          <a:p xmlns:a="http://schemas.openxmlformats.org/drawingml/2006/main">
+            <a:pPr algn="l">
+              <a:defRPr sz="1800" b="0">
+                <a:solidFill>
+                  <a:srgbClr val="143042"/>
+                </a:solidFill>
+                <a:latin typeface="Arial"/>
+                <a:ea typeface="Arial"/>
+                <a:cs typeface="Arial"/>
+              </a:defRPr>
+            </a:pPr>
+            <a:r>
+              <a:rPr sz="1800" b="0">
+                <a:solidFill>
+                  <a:srgbClr val="143042"/>
+                </a:solidFill>
+                <a:latin typeface="Arial"/>
+                <a:ea typeface="Arial"/>
+                <a:cs typeface="Arial"/>
+              </a:rPr>
+              <a:t>mantém indução.</a:t>
             </a:r>
           </a:p>
         </p:txBody>
       </p:sp>
       <p:sp>
         <p:nvSpPr>
-          <p:cNvPr id="11" name="Próxima interação, hipótese: rever blefes e confiança nos sinais.">
+          <p:cNvPr id="12" name="B vence com trinca.&#10;A=50, B=170, pote=0.&#10;A revê leitura futura.">
             <a:extLst xmlns:a="http://schemas.openxmlformats.org/drawingml/2006/main">
               <a:ext uri="{FF2B5EF4-FFF2-40B4-BE49-F238E27FC236}">
-                <a16:creationId xmlns:a16="http://schemas.microsoft.com/office/drawing/2014/main" id="{34E39573-52C8-4F77-B46D-FCAAA445E6F7}"/>
+                <a16:creationId xmlns:a16="http://schemas.microsoft.com/office/drawing/2014/main" id="{7C7FC91F-D7A5-4B21-9CD6-A2B7DFC0F7C7}"/>
               </a:ext>
             </a:extLst>
           </p:cNvPr>
@@ -2803,8 +2948,8 @@
         </p:nvSpPr>
         <p:spPr>
           <a:xfrm xmlns:a="http://schemas.openxmlformats.org/drawingml/2006/main">
-            <a:off x="571500" y="5829300"/>
-            <a:ext cx="11049000" cy="457200"/>
+            <a:off x="9153525" y="3048000"/>
+            <a:ext cx="2667000" cy="1238250"/>
           </a:xfrm>
           <a:prstGeom xmlns:a="http://schemas.openxmlformats.org/drawingml/2006/main" prst="rect">
             <a:avLst/>
@@ -2821,6 +2966,227 @@
           <a:lstStyle xmlns:a="http://schemas.openxmlformats.org/drawingml/2006/main"/>
           <a:p xmlns:a="http://schemas.openxmlformats.org/drawingml/2006/main">
             <a:pPr algn="l">
+              <a:defRPr sz="1800" b="0">
+                <a:solidFill>
+                  <a:srgbClr val="143042"/>
+                </a:solidFill>
+                <a:latin typeface="Arial"/>
+                <a:ea typeface="Arial"/>
+                <a:cs typeface="Arial"/>
+              </a:defRPr>
+            </a:pPr>
+            <a:r>
+              <a:rPr sz="1800" b="0">
+                <a:solidFill>
+                  <a:srgbClr val="143042"/>
+                </a:solidFill>
+                <a:latin typeface="Arial"/>
+                <a:ea typeface="Arial"/>
+                <a:cs typeface="Arial"/>
+              </a:rPr>
+              <a:t>B vence com trinca.</a:t>
+            </a:r>
+          </a:p>
+          <a:p xmlns:a="http://schemas.openxmlformats.org/drawingml/2006/main">
+            <a:pPr algn="l">
+              <a:defRPr sz="1800" b="0">
+                <a:solidFill>
+                  <a:srgbClr val="143042"/>
+                </a:solidFill>
+                <a:latin typeface="Arial"/>
+                <a:ea typeface="Arial"/>
+                <a:cs typeface="Arial"/>
+              </a:defRPr>
+            </a:pPr>
+            <a:r>
+              <a:rPr sz="1800" b="0">
+                <a:solidFill>
+                  <a:srgbClr val="143042"/>
+                </a:solidFill>
+                <a:latin typeface="Arial"/>
+                <a:ea typeface="Arial"/>
+                <a:cs typeface="Arial"/>
+              </a:rPr>
+              <a:t>A=50, B=170, pote=0.</a:t>
+            </a:r>
+          </a:p>
+          <a:p xmlns:a="http://schemas.openxmlformats.org/drawingml/2006/main">
+            <a:pPr algn="l">
+              <a:defRPr sz="1800" b="0">
+                <a:solidFill>
+                  <a:srgbClr val="143042"/>
+                </a:solidFill>
+                <a:latin typeface="Arial"/>
+                <a:ea typeface="Arial"/>
+                <a:cs typeface="Arial"/>
+              </a:defRPr>
+            </a:pPr>
+            <a:r>
+              <a:rPr sz="1800" b="0">
+                <a:solidFill>
+                  <a:srgbClr val="143042"/>
+                </a:solidFill>
+                <a:latin typeface="Arial"/>
+                <a:ea typeface="Arial"/>
+                <a:cs typeface="Arial"/>
+              </a:rPr>
+              <a:t>A revê leitura futura.</a:t>
+            </a:r>
+          </a:p>
+        </p:txBody>
+      </p:sp>
+      <p:sp>
+        <p:nvSpPr>
+          <p:cNvPr id="13" name="Custos: A expõe fichas. B pode perder aposta ou oferecer carta gr">
+            <a:extLst xmlns:a="http://schemas.openxmlformats.org/drawingml/2006/main">
+              <a:ext uri="{FF2B5EF4-FFF2-40B4-BE49-F238E27FC236}">
+                <a16:creationId xmlns:a16="http://schemas.microsoft.com/office/drawing/2014/main" id="{89F936A9-8A85-4C51-B082-F74B8432B99F}"/>
+              </a:ext>
+            </a:extLst>
+          </p:cNvPr>
+          <p:cNvSpPr>
+            <a:spLocks xmlns:a="http://schemas.openxmlformats.org/drawingml/2006/main" noGrp="1"/>
+          </p:cNvSpPr>
+          <p:nvPr/>
+        </p:nvSpPr>
+        <p:spPr>
+          <a:xfrm xmlns:a="http://schemas.openxmlformats.org/drawingml/2006/main">
+            <a:off x="381000" y="4343400"/>
+            <a:ext cx="11430000" cy="476250"/>
+          </a:xfrm>
+          <a:prstGeom xmlns:a="http://schemas.openxmlformats.org/drawingml/2006/main" prst="rect">
+            <a:avLst/>
+          </a:prstGeom>
+          <a:noFill xmlns:a="http://schemas.openxmlformats.org/drawingml/2006/main"/>
+          <a:ln xmlns:a="http://schemas.openxmlformats.org/drawingml/2006/main" w="0">
+            <a:noFill/>
+          </a:ln>
+        </p:spPr>
+        <p:txBody>
+          <a:bodyPr xmlns:a="http://schemas.openxmlformats.org/drawingml/2006/main" wrap="square" lIns="0" tIns="0" rIns="0" bIns="0" anchor="t">
+            <a:noAutofit/>
+          </a:bodyPr>
+          <a:lstStyle xmlns:a="http://schemas.openxmlformats.org/drawingml/2006/main"/>
+          <a:p xmlns:a="http://schemas.openxmlformats.org/drawingml/2006/main">
+            <a:pPr algn="l">
+              <a:defRPr sz="1950" b="1">
+                <a:solidFill>
+                  <a:srgbClr val="14755E"/>
+                </a:solidFill>
+                <a:latin typeface="Arial"/>
+                <a:ea typeface="Arial"/>
+                <a:cs typeface="Arial"/>
+              </a:defRPr>
+            </a:pPr>
+            <a:r>
+              <a:rPr sz="1950" b="1">
+                <a:solidFill>
+                  <a:srgbClr val="14755E"/>
+                </a:solidFill>
+                <a:latin typeface="Arial"/>
+                <a:ea typeface="Arial"/>
+                <a:cs typeface="Arial"/>
+              </a:rPr>
+              <a:t>Custos: A expõe fichas. B pode perder aposta ou oferecer carta gratuita.</a:t>
+            </a:r>
+          </a:p>
+        </p:txBody>
+      </p:sp>
+      <p:sp>
+        <p:nvSpPr>
+          <p:cNvPr id="14" name="Alternativa no pré-flop: A all-in de 105, contribuição total 110">
+            <a:extLst xmlns:a="http://schemas.openxmlformats.org/drawingml/2006/main">
+              <a:ext uri="{FF2B5EF4-FFF2-40B4-BE49-F238E27FC236}">
+                <a16:creationId xmlns:a16="http://schemas.microsoft.com/office/drawing/2014/main" id="{3B4AD446-F02D-4658-B39B-08557DBEB4DC}"/>
+              </a:ext>
+            </a:extLst>
+          </p:cNvPr>
+          <p:cNvSpPr>
+            <a:spLocks xmlns:a="http://schemas.openxmlformats.org/drawingml/2006/main" noGrp="1"/>
+          </p:cNvSpPr>
+          <p:nvPr/>
+        </p:nvSpPr>
+        <p:spPr>
+          <a:xfrm xmlns:a="http://schemas.openxmlformats.org/drawingml/2006/main">
+            <a:off x="381000" y="4914900"/>
+            <a:ext cx="11430000" cy="381000"/>
+          </a:xfrm>
+          <a:prstGeom xmlns:a="http://schemas.openxmlformats.org/drawingml/2006/main" prst="rect">
+            <a:avLst/>
+          </a:prstGeom>
+          <a:noFill xmlns:a="http://schemas.openxmlformats.org/drawingml/2006/main"/>
+          <a:ln xmlns:a="http://schemas.openxmlformats.org/drawingml/2006/main" w="0">
+            <a:noFill/>
+          </a:ln>
+        </p:spPr>
+        <p:txBody>
+          <a:bodyPr xmlns:a="http://schemas.openxmlformats.org/drawingml/2006/main" wrap="square" lIns="0" tIns="0" rIns="0" bIns="0" anchor="t">
+            <a:noAutofit/>
+          </a:bodyPr>
+          <a:lstStyle xmlns:a="http://schemas.openxmlformats.org/drawingml/2006/main"/>
+          <a:p xmlns:a="http://schemas.openxmlformats.org/drawingml/2006/main">
+            <a:pPr algn="l">
+              <a:defRPr sz="2025" b="1">
+                <a:solidFill>
+                  <a:srgbClr val="143042"/>
+                </a:solidFill>
+                <a:latin typeface="Arial"/>
+                <a:ea typeface="Arial"/>
+                <a:cs typeface="Arial"/>
+              </a:defRPr>
+            </a:pPr>
+            <a:r>
+              <a:rPr sz="2025" b="1">
+                <a:solidFill>
+                  <a:srgbClr val="143042"/>
+                </a:solidFill>
+                <a:latin typeface="Arial"/>
+                <a:ea typeface="Arial"/>
+                <a:cs typeface="Arial"/>
+              </a:rPr>
+              <a:t>Alternativa no pré-flop: A all-in de 105, contribuição total 110</a:t>
+            </a:r>
+          </a:p>
+        </p:txBody>
+      </p:sp>
+      <p:sp>
+        <p:nvSpPr>
+          <p:cNvPr id="15" name="B fold: A=120, B=100 Sem revelação obrigatória">
+            <a:extLst xmlns:a="http://schemas.openxmlformats.org/drawingml/2006/main">
+              <a:ext uri="{FF2B5EF4-FFF2-40B4-BE49-F238E27FC236}">
+                <a16:creationId xmlns:a16="http://schemas.microsoft.com/office/drawing/2014/main" id="{8673ABF1-F2C5-48BA-BA5B-CED7B9A8B9C6}"/>
+              </a:ext>
+            </a:extLst>
+          </p:cNvPr>
+          <p:cNvSpPr>
+            <a:spLocks xmlns:a="http://schemas.openxmlformats.org/drawingml/2006/main" noGrp="1"/>
+          </p:cNvSpPr>
+          <p:nvPr/>
+        </p:nvSpPr>
+        <p:spPr>
+          <a:xfrm xmlns:a="http://schemas.openxmlformats.org/drawingml/2006/main">
+            <a:off x="381000" y="5448300"/>
+            <a:ext cx="5334000" cy="857250"/>
+          </a:xfrm>
+          <a:prstGeom xmlns:a="http://schemas.openxmlformats.org/drawingml/2006/main" prst="rect">
+            <a:avLst/>
+          </a:prstGeom>
+          <a:solidFill xmlns:a="http://schemas.openxmlformats.org/drawingml/2006/main">
+            <a:srgbClr val="FFFFFF"/>
+          </a:solidFill>
+          <a:ln xmlns:a="http://schemas.openxmlformats.org/drawingml/2006/main" w="15240">
+            <a:solidFill>
+              <a:srgbClr val="486274"/>
+            </a:solidFill>
+          </a:ln>
+        </p:spPr>
+        <p:txBody>
+          <a:bodyPr xmlns:a="http://schemas.openxmlformats.org/drawingml/2006/main" wrap="square" lIns="95250" tIns="85725" rIns="95250" bIns="85725" anchor="ctr">
+            <a:noAutofit/>
+          </a:bodyPr>
+          <a:lstStyle xmlns:a="http://schemas.openxmlformats.org/drawingml/2006/main"/>
+          <a:p xmlns:a="http://schemas.openxmlformats.org/drawingml/2006/main">
+            <a:pPr algn="ctr">
               <a:defRPr sz="1875" b="0">
                 <a:solidFill>
                   <a:srgbClr val="486274"/>
@@ -2839,7 +3205,114 @@
                 <a:ea typeface="Arial"/>
                 <a:cs typeface="Arial"/>
               </a:rPr>
-              <a:t>Próxima interação, hipótese: rever blefes e confiança nos sinais.</a:t>
+              <a:t>B fold: A=120, B=100</a:t>
+            </a:r>
+          </a:p>
+          <a:p xmlns:a="http://schemas.openxmlformats.org/drawingml/2006/main">
+            <a:pPr algn="ctr">
+              <a:defRPr sz="1875" b="0">
+                <a:solidFill>
+                  <a:srgbClr val="486274"/>
+                </a:solidFill>
+                <a:latin typeface="Arial"/>
+                <a:ea typeface="Arial"/>
+                <a:cs typeface="Arial"/>
+              </a:defRPr>
+            </a:pPr>
+            <a:r>
+              <a:rPr sz="1875" b="0">
+                <a:solidFill>
+                  <a:srgbClr val="486274"/>
+                </a:solidFill>
+                <a:latin typeface="Arial"/>
+                <a:ea typeface="Arial"/>
+                <a:cs typeface="Arial"/>
+              </a:rPr>
+              <a:t>Sem revelação obrigatória</a:t>
+            </a:r>
+          </a:p>
+        </p:txBody>
+      </p:sp>
+      <p:sp>
+        <p:nvSpPr>
+          <p:cNvPr id="16" name="B call 100: runout sem apostas B vence, A=0, B=220">
+            <a:extLst xmlns:a="http://schemas.openxmlformats.org/drawingml/2006/main">
+              <a:ext uri="{FF2B5EF4-FFF2-40B4-BE49-F238E27FC236}">
+                <a16:creationId xmlns:a16="http://schemas.microsoft.com/office/drawing/2014/main" id="{62DE7DE5-EC07-46D0-9E5C-A2463DC52904}"/>
+              </a:ext>
+            </a:extLst>
+          </p:cNvPr>
+          <p:cNvSpPr>
+            <a:spLocks xmlns:a="http://schemas.openxmlformats.org/drawingml/2006/main" noGrp="1"/>
+          </p:cNvSpPr>
+          <p:nvPr/>
+        </p:nvSpPr>
+        <p:spPr>
+          <a:xfrm xmlns:a="http://schemas.openxmlformats.org/drawingml/2006/main">
+            <a:off x="6477000" y="5448300"/>
+            <a:ext cx="5334000" cy="857250"/>
+          </a:xfrm>
+          <a:prstGeom xmlns:a="http://schemas.openxmlformats.org/drawingml/2006/main" prst="rect">
+            <a:avLst/>
+          </a:prstGeom>
+          <a:solidFill xmlns:a="http://schemas.openxmlformats.org/drawingml/2006/main">
+            <a:srgbClr val="FFFFFF"/>
+          </a:solidFill>
+          <a:ln xmlns:a="http://schemas.openxmlformats.org/drawingml/2006/main" w="15240">
+            <a:solidFill>
+              <a:srgbClr val="486274"/>
+            </a:solidFill>
+          </a:ln>
+        </p:spPr>
+        <p:txBody>
+          <a:bodyPr xmlns:a="http://schemas.openxmlformats.org/drawingml/2006/main" wrap="square" lIns="95250" tIns="85725" rIns="95250" bIns="85725" anchor="ctr">
+            <a:noAutofit/>
+          </a:bodyPr>
+          <a:lstStyle xmlns:a="http://schemas.openxmlformats.org/drawingml/2006/main"/>
+          <a:p xmlns:a="http://schemas.openxmlformats.org/drawingml/2006/main">
+            <a:pPr algn="ctr">
+              <a:defRPr sz="1875" b="0">
+                <a:solidFill>
+                  <a:srgbClr val="486274"/>
+                </a:solidFill>
+                <a:latin typeface="Arial"/>
+                <a:ea typeface="Arial"/>
+                <a:cs typeface="Arial"/>
+              </a:defRPr>
+            </a:pPr>
+            <a:r>
+              <a:rPr sz="1875" b="0">
+                <a:solidFill>
+                  <a:srgbClr val="486274"/>
+                </a:solidFill>
+                <a:latin typeface="Arial"/>
+                <a:ea typeface="Arial"/>
+                <a:cs typeface="Arial"/>
+              </a:rPr>
+              <a:t>B call 100: runout sem apostas</a:t>
+            </a:r>
+          </a:p>
+          <a:p xmlns:a="http://schemas.openxmlformats.org/drawingml/2006/main">
+            <a:pPr algn="ctr">
+              <a:defRPr sz="1875" b="0">
+                <a:solidFill>
+                  <a:srgbClr val="486274"/>
+                </a:solidFill>
+                <a:latin typeface="Arial"/>
+                <a:ea typeface="Arial"/>
+                <a:cs typeface="Arial"/>
+              </a:defRPr>
+            </a:pPr>
+            <a:r>
+              <a:rPr sz="1875" b="0">
+                <a:solidFill>
+                  <a:srgbClr val="486274"/>
+                </a:solidFill>
+                <a:latin typeface="Arial"/>
+                <a:ea typeface="Arial"/>
+                <a:cs typeface="Arial"/>
+              </a:rPr>
+              <a:t>B vence, A=0, B=220</a:t>
             </a:r>
           </a:p>
         </p:txBody>
@@ -2847,7 +3320,7 @@
     </p:spTree>
     <p:extLst>
       <p:ext uri="{BB962C8B-B14F-4D97-AF65-F5344CB8AC3E}">
-        <p14:creationId xmlns:p14="http://schemas.microsoft.com/office/powerpoint/2010/main" val="1034200673"/>
+        <p14:creationId xmlns:p14="http://schemas.microsoft.com/office/powerpoint/2010/main" val="48680629"/>
       </p:ext>
     </p:extLst>
   </p:cSld>
@@ -2878,7 +3351,7 @@
           <p:cNvPr id="18" name="Superfície de ataque">
             <a:extLst xmlns:a="http://schemas.openxmlformats.org/drawingml/2006/main">
               <a:ext uri="{FF2B5EF4-FFF2-40B4-BE49-F238E27FC236}">
-                <a16:creationId xmlns:a16="http://schemas.microsoft.com/office/drawing/2014/main" id="{7E6BD7F6-AC82-40AA-92BB-EC51535B81FD}"/>
+                <a16:creationId xmlns:a16="http://schemas.microsoft.com/office/drawing/2014/main" id="{0D48801C-33CD-4A87-84F2-35871AFCB7EA}"/>
               </a:ext>
             </a:extLst>
           </p:cNvPr>
@@ -2935,7 +3408,7 @@
           <p:cNvPr id="2" name="Módulo adversarial">
             <a:extLst xmlns:a="http://schemas.openxmlformats.org/drawingml/2006/main">
               <a:ext uri="{FF2B5EF4-FFF2-40B4-BE49-F238E27FC236}">
-                <a16:creationId xmlns:a16="http://schemas.microsoft.com/office/drawing/2014/main" id="{DBBFD6F1-A85F-440E-93C5-CB04583F7C0F}"/>
+                <a16:creationId xmlns:a16="http://schemas.microsoft.com/office/drawing/2014/main" id="{1E74743E-039B-4EC5-9AFD-FCB3112A1323}"/>
               </a:ext>
             </a:extLst>
           </p:cNvPr>
@@ -2996,7 +3469,7 @@
           <p:cNvPr id="3" name="T1: visão e histórico Campo privado sem filtro Falha de P1">
             <a:extLst xmlns:a="http://schemas.openxmlformats.org/drawingml/2006/main">
               <a:ext uri="{FF2B5EF4-FFF2-40B4-BE49-F238E27FC236}">
-                <a16:creationId xmlns:a16="http://schemas.microsoft.com/office/drawing/2014/main" id="{D7A40B5E-FC38-4909-90E8-22EFB906EE9E}"/>
+                <a16:creationId xmlns:a16="http://schemas.microsoft.com/office/drawing/2014/main" id="{7D5E2505-46A1-4375-B20C-52F1761A4895}"/>
               </a:ext>
             </a:extLst>
           </p:cNvPr>
@@ -3100,10 +3573,10 @@
       </p:sp>
       <p:sp>
         <p:nvSpPr>
-          <p:cNvPr id="4" name="T2: entrada de ações Valor ou vez sem validação Falha de P2">
+          <p:cNvPr id="4" name="T2: entrada de ações Raise, call ou devolução inválidos Falha de P2">
             <a:extLst xmlns:a="http://schemas.openxmlformats.org/drawingml/2006/main">
               <a:ext uri="{FF2B5EF4-FFF2-40B4-BE49-F238E27FC236}">
-                <a16:creationId xmlns:a16="http://schemas.microsoft.com/office/drawing/2014/main" id="{681E2CB4-B71C-422B-91DA-EC758DE13C80}"/>
+                <a16:creationId xmlns:a16="http://schemas.microsoft.com/office/drawing/2014/main" id="{D4B75836-CAC3-4417-AA0F-809E8F88D0C0}"/>
               </a:ext>
             </a:extLst>
           </p:cNvPr>
@@ -3136,17 +3609,17 @@
           <a:lstStyle xmlns:a="http://schemas.openxmlformats.org/drawingml/2006/main"/>
           <a:p xmlns:a="http://schemas.openxmlformats.org/drawingml/2006/main">
             <a:pPr algn="ctr">
-              <a:defRPr sz="1800" b="0">
-                <a:solidFill>
-                  <a:srgbClr val="143042"/>
-                </a:solidFill>
-                <a:latin typeface="Arial"/>
-                <a:ea typeface="Arial"/>
-                <a:cs typeface="Arial"/>
-              </a:defRPr>
-            </a:pPr>
-            <a:r>
-              <a:rPr sz="1800" b="0">
+              <a:defRPr sz="1650" b="0">
+                <a:solidFill>
+                  <a:srgbClr val="143042"/>
+                </a:solidFill>
+                <a:latin typeface="Arial"/>
+                <a:ea typeface="Arial"/>
+                <a:cs typeface="Arial"/>
+              </a:defRPr>
+            </a:pPr>
+            <a:r>
+              <a:rPr sz="1650" b="0">
                 <a:solidFill>
                   <a:srgbClr val="143042"/>
                 </a:solidFill>
@@ -3159,40 +3632,40 @@
           </a:p>
           <a:p xmlns:a="http://schemas.openxmlformats.org/drawingml/2006/main">
             <a:pPr algn="ctr">
-              <a:defRPr sz="1800" b="0">
-                <a:solidFill>
-                  <a:srgbClr val="143042"/>
-                </a:solidFill>
-                <a:latin typeface="Arial"/>
-                <a:ea typeface="Arial"/>
-                <a:cs typeface="Arial"/>
-              </a:defRPr>
-            </a:pPr>
-            <a:r>
-              <a:rPr sz="1800" b="0">
-                <a:solidFill>
-                  <a:srgbClr val="143042"/>
-                </a:solidFill>
-                <a:latin typeface="Arial"/>
-                <a:ea typeface="Arial"/>
-                <a:cs typeface="Arial"/>
-              </a:rPr>
-              <a:t>Valor ou vez sem validação</a:t>
-            </a:r>
-          </a:p>
-          <a:p xmlns:a="http://schemas.openxmlformats.org/drawingml/2006/main">
-            <a:pPr algn="ctr">
-              <a:defRPr sz="1800" b="0">
-                <a:solidFill>
-                  <a:srgbClr val="143042"/>
-                </a:solidFill>
-                <a:latin typeface="Arial"/>
-                <a:ea typeface="Arial"/>
-                <a:cs typeface="Arial"/>
-              </a:defRPr>
-            </a:pPr>
-            <a:r>
-              <a:rPr sz="1800" b="0">
+              <a:defRPr sz="1650" b="0">
+                <a:solidFill>
+                  <a:srgbClr val="143042"/>
+                </a:solidFill>
+                <a:latin typeface="Arial"/>
+                <a:ea typeface="Arial"/>
+                <a:cs typeface="Arial"/>
+              </a:defRPr>
+            </a:pPr>
+            <a:r>
+              <a:rPr sz="1650" b="0">
+                <a:solidFill>
+                  <a:srgbClr val="143042"/>
+                </a:solidFill>
+                <a:latin typeface="Arial"/>
+                <a:ea typeface="Arial"/>
+                <a:cs typeface="Arial"/>
+              </a:rPr>
+              <a:t>Raise, call ou devolução inválidos</a:t>
+            </a:r>
+          </a:p>
+          <a:p xmlns:a="http://schemas.openxmlformats.org/drawingml/2006/main">
+            <a:pPr algn="ctr">
+              <a:defRPr sz="1650" b="0">
+                <a:solidFill>
+                  <a:srgbClr val="143042"/>
+                </a:solidFill>
+                <a:latin typeface="Arial"/>
+                <a:ea typeface="Arial"/>
+                <a:cs typeface="Arial"/>
+              </a:defRPr>
+            </a:pPr>
+            <a:r>
+              <a:rPr sz="1650" b="0">
                 <a:solidFill>
                   <a:srgbClr val="143042"/>
                 </a:solidFill>
@@ -3210,7 +3683,7 @@
           <p:cNvPr id="5" name="T3: executor Decisão sem limite Falha de P3">
             <a:extLst xmlns:a="http://schemas.openxmlformats.org/drawingml/2006/main">
               <a:ext uri="{FF2B5EF4-FFF2-40B4-BE49-F238E27FC236}">
-                <a16:creationId xmlns:a16="http://schemas.microsoft.com/office/drawing/2014/main" id="{0BD2FDE6-C39A-4A85-A0C1-E330EB89ADFB}"/>
+                <a16:creationId xmlns:a16="http://schemas.microsoft.com/office/drawing/2014/main" id="{B5A0F386-4A7E-4EE1-9173-F35E2D14959F}"/>
               </a:ext>
             </a:extLst>
           </p:cNvPr>
@@ -3317,7 +3790,7 @@
           <p:cNvPr id="6" name="Sigilo e justiça Risco 9">
             <a:extLst xmlns:a="http://schemas.openxmlformats.org/drawingml/2006/main">
               <a:ext uri="{FF2B5EF4-FFF2-40B4-BE49-F238E27FC236}">
-                <a16:creationId xmlns:a16="http://schemas.microsoft.com/office/drawing/2014/main" id="{606ECDD0-B07B-4B88-9C13-F22FE7EA6A69}"/>
+                <a16:creationId xmlns:a16="http://schemas.microsoft.com/office/drawing/2014/main" id="{8A7CD40B-F4C9-4EF2-B072-E2B725D9E808}"/>
               </a:ext>
             </a:extLst>
           </p:cNvPr>
@@ -3401,7 +3874,7 @@
           <p:cNvPr id="7" name="Integridade e fichas Risco 9">
             <a:extLst xmlns:a="http://schemas.openxmlformats.org/drawingml/2006/main">
               <a:ext uri="{FF2B5EF4-FFF2-40B4-BE49-F238E27FC236}">
-                <a16:creationId xmlns:a16="http://schemas.microsoft.com/office/drawing/2014/main" id="{98F9EF88-78C5-4C11-AC3D-07A6FD5ADB68}"/>
+                <a16:creationId xmlns:a16="http://schemas.microsoft.com/office/drawing/2014/main" id="{FE9E39D3-B59F-4050-B95B-2AC975A348B9}"/>
               </a:ext>
             </a:extLst>
           </p:cNvPr>
@@ -3485,7 +3958,7 @@
           <p:cNvPr id="8" name="Progresso Risco 6">
             <a:extLst xmlns:a="http://schemas.openxmlformats.org/drawingml/2006/main">
               <a:ext uri="{FF2B5EF4-FFF2-40B4-BE49-F238E27FC236}">
-                <a16:creationId xmlns:a16="http://schemas.microsoft.com/office/drawing/2014/main" id="{8E01768F-8A81-41B3-9E5B-A94A194A97D8}"/>
+                <a16:creationId xmlns:a16="http://schemas.microsoft.com/office/drawing/2014/main" id="{063888D8-FA88-4F65-8FA0-DE687BE0E39A}"/>
               </a:ext>
             </a:extLst>
           </p:cNvPr>
@@ -3731,7 +4204,7 @@
           <p:cNvPr id="15" name="C1: filtrar saídas">
             <a:extLst xmlns:a="http://schemas.openxmlformats.org/drawingml/2006/main">
               <a:ext uri="{FF2B5EF4-FFF2-40B4-BE49-F238E27FC236}">
-                <a16:creationId xmlns:a16="http://schemas.microsoft.com/office/drawing/2014/main" id="{FA75D062-7D45-4F42-B1C4-AE9EDE0AD21B}"/>
+                <a16:creationId xmlns:a16="http://schemas.microsoft.com/office/drawing/2014/main" id="{B0C996C1-D7B0-4D8C-8BDC-C16EEF569648}"/>
               </a:ext>
             </a:extLst>
           </p:cNvPr>
@@ -3785,10 +4258,10 @@
       </p:sp>
       <p:sp>
         <p:nvSpPr>
-          <p:cNvPr id="16" name="C2/C3: validar, aplicar uma vez">
+          <p:cNvPr id="16" name="C2/C3: validar fichas e aplicar uma vez">
             <a:extLst xmlns:a="http://schemas.openxmlformats.org/drawingml/2006/main">
               <a:ext uri="{FF2B5EF4-FFF2-40B4-BE49-F238E27FC236}">
-                <a16:creationId xmlns:a16="http://schemas.microsoft.com/office/drawing/2014/main" id="{D06CBA58-2E8C-48F7-B7C7-F0EFDA54934E}"/>
+                <a16:creationId xmlns:a16="http://schemas.microsoft.com/office/drawing/2014/main" id="{A6776C77-2F1F-4705-8ED7-ABCBCD2D1C27}"/>
               </a:ext>
             </a:extLst>
           </p:cNvPr>
@@ -3835,7 +4308,7 @@
                 <a:ea typeface="Arial"/>
                 <a:cs typeface="Arial"/>
               </a:rPr>
-              <a:t>C2/C3: validar, aplicar uma vez</a:t>
+              <a:t>C2/C3: validar fichas e aplicar uma vez</a:t>
             </a:r>
           </a:p>
         </p:txBody>
@@ -3845,7 +4318,7 @@
           <p:cNvPr id="17" name="C4: orçamento e ação padrão">
             <a:extLst xmlns:a="http://schemas.openxmlformats.org/drawingml/2006/main">
               <a:ext uri="{FF2B5EF4-FFF2-40B4-BE49-F238E27FC236}">
-                <a16:creationId xmlns:a16="http://schemas.microsoft.com/office/drawing/2014/main" id="{948704F2-217F-46B1-ACB2-40034CD78756}"/>
+                <a16:creationId xmlns:a16="http://schemas.microsoft.com/office/drawing/2014/main" id="{2FA2FFFC-DA32-4965-A04C-E1ED33196545}"/>
               </a:ext>
             </a:extLst>
           </p:cNvPr>
@@ -3900,7 +4373,7 @@
     </p:spTree>
     <p:extLst>
       <p:ext uri="{BB962C8B-B14F-4D97-AF65-F5344CB8AC3E}">
-        <p14:creationId xmlns:p14="http://schemas.microsoft.com/office/powerpoint/2010/main" val="478942577"/>
+        <p14:creationId xmlns:p14="http://schemas.microsoft.com/office/powerpoint/2010/main" val="1244758915"/>
       </p:ext>
     </p:extLst>
   </p:cSld>
